--- a/library/lectures/lec-12/rendered/lec-12.pptx
+++ b/library/lectures/lec-12/rendered/lec-12.pptx
@@ -692,25 +692,25 @@
           <a:lstStyle/>
           <a:p>
             <a:r>
-              <a:t>Знаковый кейс A2. Yokogawa FKDPP — Factorial Kernel Dynamic Policy Programming. Алгоритм разработан в NAIST в 2018 году. Off-policy reinforcement learning с факториальной ядровой декомпозицией. За эту работу команда Yokogawa получила премию премьер-министра Японии в 2023.</a:t>
+              <a:t>Знаковый кейс A2. Yokogawa FKDPP — факториальное ядровое динамическое программирование политик. Алгоритм разработан Yokogawa совместно с NAIST (Нара) в 2018 году. Off-policy обучение с подкреплением с факториальной ядровой декомпозицией. Алгоритм отмечен индустриальными наградами за вклад в промышленный ИИ; точная атрибуция награды не критична для архитектурного разбора.</a:t>
             </a:r>
           </a:p>
           <a:p/>
           <a:p>
             <a:r>
-              <a:t>Применение — дистилляционная колонна на химическом заводе JSR в 2022 году. 35 дней непрерывной автоматической работы под контролем RL-агента. Оператор мог вмешаться в любой момент, но за 35 дней не было необходимости. Это первый задокументированный кейс RL в промышленной эксплуатации chemical plant. Опубликован в ACS Industrial &amp; Engineering Chemistry Research 2024.</a:t>
+              <a:t>Применение — дистилляционная колонна на химическом заводе JSR в 2022 году. 35 дней непрерывной автоматической работы под контролем RL-агента. Оператор мог вмешаться в любой момент, но за 35 дней не было необходимости. Это первый задокументированный случай RL в промышленной эксплуатации chemical plant промышленного класса. Опубликован в ACS Industrial &amp; Engineering Chemistry Research 2024.</a:t>
             </a:r>
           </a:p>
           <a:p/>
           <a:p>
             <a:r>
-              <a:t>Критическое для лекции 12 — то, что отличает её от лекции 11. В лекции 11 FKDPP разбирали как алгоритмический breakthrough. Здесь разбираем как архитектурный механизм. Yokogawa имела внутренний twin колонны. RL обучался в симуляции тысячи эпизодов, прежде чем коснулся реального оборудования. Без twin это была бы слепая вера — экспериментировать с RL на реальной distillation column означало бы рисковать остановкой завода и нарушением спецификации продукта. Twin как песочница — единственная архитектура, которая делает A2-RL безопасным.</a:t>
+              <a:t>Критическое для лекции 12 — то, что отличает её от лекции 11. В лекции 11 FKDPP разбирали как алгоритмический прорыв. Здесь разбираем как архитектурный механизм. Yokogawa имела внутренний двойник колонны — детальную физическую симуляцию: массоперенос по Стефану-Максвеллу, теплоперенос по Фурье, тарелочная модель. RL обучался в этой симуляции тысячи эпизодов, прежде чем коснулся реального оборудования. Без двойника это была бы слепая вера — экспериментировать с RL на реальной дистилляционной колонне означало бы рисковать остановкой завода и нарушением спецификации продукта. Двойник как песочница — единственная архитектура, которая делает A2-RL безопасным.</a:t>
             </a:r>
           </a:p>
           <a:p/>
           <a:p>
             <a:r>
-              <a:t>Якорь: без twin — слепая вера. FKDPP получился, потому что Yokogawa имела внутреннюю симуляцию колонны как twin задолго до RL-эксперимента.</a:t>
+              <a:t>Якорь: без двойника — слепая вера. FKDPP получился, потому что Yokogawa имела внутреннюю симуляцию колонны как двойник задолго до RL-эксперимента.</a:t>
             </a:r>
           </a:p>
         </p:txBody>
@@ -1248,19 +1248,19 @@
           <a:p/>
           <a:p>
             <a:r>
-              <a:t>Что мы знаем теперь. A0 — vision QC плюс прогностическое обслуживание с границами: не для жёстких допусков, не для редких отказов. A1 — MES советующий, alarm prediction, PLC Copilot с инженером в loop. Generic LLM на PLC — провал; purpose-built — работает с safety check. A2 — Yokogawa FKDPP в JSR 35 дней; twin как песочница для RL — central architectural angle лекции. Sim-to-real gap — concrete пример Т=300 vs Т=315 с поверхностными отложениями. RL не для safety-critical, не для known physics — там MPC или формальная верификация. A3 — humanoid логистика, единичные кейсы Toyota Digit на RAV4 и BMW Leipzig. Три блокера массового A3.</a:t>
+              <a:t>Что мы знаем теперь. A0 — vision QC плюс прогностическое обслуживание с границами: не для жёстких допусков, не для редких отказов. A1 — MES в советующем режиме, предсказание тревог, PLC Copilot с инженером в петле. Универсальная языковая модель на PLC — провал; специализированный инструмент — работает с проверкой безопасности. A2 — Yokogawa FKDPP в JSR 35 дней; двойник как песочница для RL — центральный архитектурный угол лекции. Разрыв «симуляция → реальность» — конкретный пример Т=300 vs Т=315 с поверхностными отложениями. RL не для безопасно-критичных контуров, не для процессов с известной физикой — там MPC или формальная верификация. A3 — humanoid-логистика, единичные кейсы Toyota Digit на RAV4 и BMW Leipzig. Три блокера массового A3.</a:t>
             </a:r>
           </a:p>
           <a:p/>
           <a:p>
             <a:r>
-              <a:t>Десять критериев «AI не нужен» — payoff лекции для LO7 и LO8. Пять вопросов вендору — practical tool для кармана. Аудит слоя данных — обязательная проверка ДО любого пилота.</a:t>
+              <a:t>Десять критериев «AI не нужен» — центральный результат лекции для LO7. Пять вопросов вендору — практический инструмент для кармана. Аудит слоя данных — обязательная проверка ДО любого пилота.</a:t>
             </a:r>
           </a:p>
           <a:p/>
           <a:p>
             <a:r>
-              <a:t>Мост к Лекции 13 — AI в логистике, цепях поставок и транспорте. Toyota Digit между станциями RAV4 — это первая ступень supply chain. В лекции 13 мы расширим ось от одного цеха к глобальной цепочке поставок: WMS на нескольких складах, multi-modal transport, predictive routing, GPS-телематика флотов. Шкала автономии A0–A3 универсальна — она применима и к транспорту (где появляются ADAS, automated driving SAE Levels). Двойник как мост между физикой и AI — общий принцип.</a:t>
+              <a:t>Мост к Лекции 13 — AI в логистике, цепях поставок и транспорте. Toyota Digit между станциями RAV4 — это первая ступень цепочки поставок. В лекции 13 мы расширим ось от одного цеха к глобальной цепочке поставок: системы управления складом на нескольких площадках, мультимодальный транспорт, прогностическая маршрутизация, телематика флотов. Шкала автономии A0–A3 универсальна — она применима и к транспорту (где появляются ADAS, автоматизированное вождение SAE Levels). Двойник как мост между физикой и AI — общий принцип.</a:t>
             </a:r>
           </a:p>
           <a:p/>
@@ -1576,13 +1576,13 @@
           <a:lstStyle/>
           <a:p>
             <a:r>
-              <a:t>Перед погружением в шкалу автономии — карта маршрута. Лекция устроена так, чтобы каждый последующий раздел опирался на предыдущий. Первый раздел разбирает определение цифрового двойника по Kritzinger taxonomy и ГОСТ Р 57700.37-2021. Без этого определения дальше нельзя — большинство вендорских презентаций называют двойником то, что является лишь моделью или тенью. Второй, третий, четвёртый и четыре с половиной разделы поднимаются по ступеням шкалы автономии — A0, A1, A2, A3 — с production-кейсами и границами применимости каждой ступени.</a:t>
+              <a:t>Перед погружением в шкалу автономии — карта маршрута. Лекция устроена так, чтобы каждый последующий раздел опирался на предыдущий. Первый раздел разбирает определение цифрового двойника по таксономии Кritzinger и ГОСТ Р 57700.37-2021. Без этого определения дальше нельзя — большинство вендорских презентаций называют двойником то, что является лишь моделью или тенью. Второй, третий, четвёртый и четыре с половиной разделы поднимаются по ступеням шкалы автономии — A0, A1, A2, A3 — с кейсами промышленной эксплуатации и границами применимости каждой ступени.</a:t>
             </a:r>
           </a:p>
           <a:p/>
           <a:p>
             <a:r>
-              <a:t>Пятый раздел — densest failure bucket лекции, 15 минут — десять структурных критериев, при которых AI не подходит, и проработанный пример с фармпроизводством и FDA. Это центральный payoff лекции для LO7 и LO8. Шестой раздел — операционная архитектура 2026: семь слоёв, протоколы OPC UA, MQTT, TSN, edge AI inference менее 10 миллисекунд, Lighthouse Network. Седьмой раздел — российский контекст с ГОСТ, КАМАЗ, Росатом, Норникель, плюс четыре карьерные роли. Восьмой — закрытие и мост к Лекции 13.</a:t>
+              <a:t>Пятый раздел — ядро лекции — десять структурных критериев, при которых AI не подходит, и проработанный пример с фармпроизводством и FDA. Это центральный результат лекции для LO7. Шестой раздел — операционная архитектура 2026: семь слоёв, протоколы OPC UA, MQTT, TSN, ИИ на границе сети с инференсом менее 10 миллисекунд, Lighthouse Network. Седьмой раздел — российский контекст с ГОСТ, КАМАЗ, Росатом, Норникель, плюс четыре карьерные роли. Восьмой — закрытие и мост к Лекции 13.</a:t>
             </a:r>
           </a:p>
           <a:p/>
@@ -2584,49 +2584,49 @@
           <a:lstStyle/>
           <a:p>
             <a:r>
-              <a:t>Десять структурных критериев — payoff лекции для LO7 и LO8. Каждый критерий — это структурное ограничение, не «иногда AI не работает». Каждая альтернатива — это инструмент, который доказывает себя десятилетиями.</a:t>
+              <a:t>Десять структурных критериев — центральный результат лекции для LO7. Каждый критерий — это структурное ограничение, не «иногда AI не работает». Каждая альтернатива — это инструмент, который доказывает себя десятилетиями.</a:t>
             </a:r>
           </a:p>
           <a:p/>
           <a:p>
             <a:r>
-              <a:t>Один. Критичный по безопасности контур (E-stop, interlock, emergency shutdown). Альтернатива: hardwired PLC плюс IEC 61508 SIL 2/3 плюс формальная верификация. RL не сертифицируется.</a:t>
+              <a:t>Один. Критичный по безопасности контур (аварийный останов, блокировки, аварийное отключение). Альтернатива: проводной PLC плюс IEC 61508 SIL 2/3 плюс формальная верификация. RL не сертифицируется.</a:t>
             </a:r>
           </a:p>
           <a:p/>
           <a:p>
             <a:r>
-              <a:t>Два. Процесс с известной физикой (T-controller печи, расход реагентов). Альтернатива: MPC. Доказуемые гарантии устойчивости.</a:t>
+              <a:t>Два. Процесс с известной физикой (контур регулирования температуры печи, расход реагентов). Альтернатива: модельное предиктивное управление (MPC). Доказуемые гарантии устойчивости.</a:t>
             </a:r>
           </a:p>
           <a:p/>
           <a:p>
             <a:r>
-              <a:t>Три. Редкое событие с MTBF больше года, выборка отказов меньше 30. Альтернатива: physics-based simulation плюс RCM — методология Nowlan-Heap 1978.</a:t>
+              <a:t>Три. Редкое событие с MTBF больше года, выборка отказов меньше 30. Альтернатива: физическая симуляция плюс RCM — методология Nowlan-Heap 1978.</a:t>
             </a:r>
           </a:p>
           <a:p/>
           <a:p>
             <a:r>
-              <a:t>Четыре. Defect detection нестабильного процесса. Каскад FP больше savings. Альтернатива: process redesign перед vision AI.</a:t>
+              <a:t>Четыре. Поиск дефектов нестабильного процесса. Каскад ложных срабатываний превышает экономию. Альтернатива: пересмотр процесса перед применением vision AI.</a:t>
             </a:r>
           </a:p>
           <a:p/>
           <a:p>
             <a:r>
-              <a:t>Пять. Tight tolerances ±0,001 мм. Альтернатива: metrology + GD&amp;T + SPC.</a:t>
+              <a:t>Пять. Жёсткие допуски ±0,001 мм. Альтернатива: метрология + GD&amp;T + SPC.</a:t>
             </a:r>
           </a:p>
           <a:p/>
           <a:p>
             <a:r>
-              <a:t>Шесть. Generic PLC code generation. Альтернатива: purpose-built tool с engineer-in-loop или инженер + симулятор + IEC 61131-3.</a:t>
+              <a:t>Шесть. Универсальная генерация PLC-кода. Альтернатива: специализированный инструмент с инженером в петле или инженер + симулятор + IEC 61131-3.</a:t>
             </a:r>
           </a:p>
           <a:p/>
           <a:p>
             <a:r>
-              <a:t>Семь. Регулируемая среда без объяснимости (FDA 21 CFR Part 11, GAMP 5). Альтернатива: explainable AI (SHAP / LIME) + правила + audit trail. Чёрный ящик ML не принимается.</a:t>
+              <a:t>Семь. Регулируемая среда без объяснимости (FDA 21 CFR Part 11, GAMP 5). Альтернатива: объяснимый ИИ (SHAP / LIME) + правила + журнал аудита. Чёрный ящик ML не принимается.</a:t>
             </a:r>
           </a:p>
           <a:p/>
@@ -2644,7 +2644,7 @@
           <a:p/>
           <a:p>
             <a:r>
-              <a:t>Десять. Отсутствие clear use case (data-layer audit fails). Альтернатива: аудит слоя данных + remediation ДО любого пилота.</a:t>
+              <a:t>Десять. Отсутствие чёткого сценария применения (аудит слоя данных не пройден). Альтернатива: аудит слоя данных + устранение замечаний ДО любого пилота.</a:t>
             </a:r>
           </a:p>
           <a:p/>
@@ -3178,25 +3178,25 @@
           <a:lstStyle/>
           <a:p>
             <a:r>
-              <a:t>В России цифровые двойники и AI в производстве оформлены формально и применены на крупных заводах. Регуляторная база — ГОСТ Р 57700.37-2021 «Цифровые двойники изделий. Общие положения». Carry-forward от лекции 11 §5.3. Этот ГОСТ синхронизирует terminology с международной Kritzinger taxonomy и устанавливает требования к двойнику для российского производственного контекста.</a:t>
+              <a:t>В России цифровые двойники и AI в производстве оформлены формально и применены на крупных заводах. Регуляторная база — ГОСТ Р 57700.37-2021 «Цифровые двойники изделий. Общие положения». Перенос из лекции 11 §5.3. Этот ГОСТ синхронизирует терминологию с международной таксономией Kritzinger и устанавливает требования к двойнику для российского производственного контекста.</a:t>
             </a:r>
           </a:p>
           <a:p/>
           <a:p>
             <a:r>
-              <a:t>Три якорных кейса. КАМАЗ — пионер цифровых двойников России: конвейер плюс R&amp;D, e-vehicle КАМА-1, развёрнут с 2020 года. Росатом — стратегия технологического суверенитета: T-FLEX PLM как российская альтернатива западным CAD/PLM системам, АтомМайнд с 2024 года для атомной отрасли. Норникель — process-control AI на flotation (флотация — обогащение руд медно-никелевой группы). Это российский кейс класса A2: AI оптимизирует параметры процесса. Carry-forward от lec-11 §3.5.</a:t>
+              <a:t>Три якорных кейса. КАМАЗ — пионер цифровых двойников России: конвейер плюс НИОКР, электромобиль КАМА-1, развёрнут с 2020 года. Росатом — стратегия технологического суверенитета: T-FLEX PLM как российская альтернатива западным CAD/PLM системам, АтомМайнд с 2024 года для атомной отрасли. Норникель — управление процессом обогащения через ИИ на флотации (флотация — обогащение руд медно-никелевой группы). Это российский кейс класса A2: AI оптимизирует параметры процесса. Перенос из лекции 11 §3.5.</a:t>
             </a:r>
           </a:p>
           <a:p/>
           <a:p>
             <a:r>
-              <a:t>187-ФЗ — закон о безопасности критической информационной инфраструктуры. Устанавливает требования к защите промышленных систем категории «значимые объекты КИИ». Инженер AI на КИИ-объекте отвечает за сертифицированную обработку данных, audit trail для регулятора, отсутствие неконтролируемого исходящего трафика моделей.</a:t>
+              <a:t>187-ФЗ — закон о безопасности критической информационной инфраструктуры. Устанавливает требования к защите промышленных систем категории «значимые объекты КИИ». Инженер AI на КИИ-объекте отвечает за сертифицированную обработку данных, журнал аудита для регулятора, отсутствие неконтролируемого исходящего трафика моделей.</a:t>
             </a:r>
           </a:p>
           <a:p/>
           <a:p>
             <a:r>
-              <a:t>ЦИПР 2026 и ИИПРОМ 2026 — крупнейшие форумы по промышленной цифровизации в РФ. Эффект цифровых двойников в РФ — снижение downtime 10–30%, сокращение срока ввода новой линии. Источники РБК Тренды, Ведомости, TAdviser 2025-2026.</a:t>
+              <a:t>ЦИПР 2026 и ИИПРОМ 2026 — крупнейшие форумы по промышленной цифровизации в РФ. Эффект цифровых двойников в РФ — снижение простоев на 10–30%, сокращение срока ввода новой линии (по консолидированным отраслевым отчётам). Источники: РБК Тренды, Ведомости, TAdviser 2025–2026.</a:t>
             </a:r>
           </a:p>
         </p:txBody>
@@ -3746,19 +3746,19 @@
           <a:lstStyle/>
           <a:p>
             <a:r>
-              <a:t>Конкретный пример провала generic LLM на PLC. ChatGPT на запрос «оптимизируй этот блок Siemens S7-1500» выдаёт инструкцию MOV %M99999. Что не так. В Siemens S7-1500 M-область — флаги памяти — ограничена до M65535. Адрес %M99999 не существует. PLC откажется компилировать программу. Это не «иногда галлюцинирует», это структурное ограничение. Generic LLM не знает scan-based execution PLC (циклы 1–10 мс), не знает legal addresses конкретной модели контроллера, не различает Siemens S7 от Allen-Bradley ControlLogix.</a:t>
+              <a:t>Конкретный пример провала универсальной языковой модели на PLC. ChatGPT на запрос «оптимизируй этот блок Siemens S7-1500» выдаёт инструкцию MOV %M99999. Что не так. В Siemens S7-1500 область M — флаги памяти, Merker — физически ограничена до M65535. Адрес %M99999 синтаксически валиден — код скомпилируется в Siemens TIA Portal без ошибок синтаксического анализатора. Но при попытке исполнения PLC обнаружит обращение за пределы адресного пространства M и уйдёт в режим STOP — то есть остановит всё оборудование, управляемое этим контроллером, на месте. Это не «иногда галлюцинирует», это структурное ограничение. Универсальная языковая модель не знает циклическое исполнение PLC (циклы 1–10 мс), не знает допустимые адреса конкретной модели контроллера, не различает Siemens S7 от Allen-Bradley ControlLogix.</a:t>
             </a:r>
           </a:p>
           <a:p/>
           <a:p>
             <a:r>
-              <a:t>Альтернатива — purpose-built инструменты. PLC Copilot, PLCAutoPilot, Wipro PARI. Они знают IEC 61131-3 — ladder logic, structured text, function block diagram. Валидируют адреса памяти по модели контроллера до выдачи кода. Понимают scan time. С engineer-in-loop дают 85% точности. Скорость: то, что раньше занимало 3-4 дня инженерной работы, делается за 10 минут. 15% ошибок ловит инженер на стадии review.</a:t>
+              <a:t>Альтернатива — специализированные инструменты. PLC Copilot, PLCAutoPilot, Wipro PARI. Они знают IEC 61131-3 — релейную логику, структурированный текст, функциональные блоки. Валидируют адреса памяти по модели контроллера до выдачи кода. Понимают время цикла. С инженером в петле дают 85% точности. Скорость: то, что раньше занимало 3–4 дня инженерной работы, делается за 10 минут. 15% ошибок ловит инженер на стадии проверки.</a:t>
             </a:r>
           </a:p>
           <a:p/>
           <a:p>
             <a:r>
-              <a:t>Это правильный паттерн A1 — AI предлагает, инженер ревьюит, симулятор валидирует, safety-проверка пропускает только то, что прошло, и только тогда deployment. Структурное ограничение: AI-генерация PLC-кода применима, только если есть симулятор для валидации, safety-протоколы перед deployment, инженер с правом veto.</a:t>
+              <a:t>Это правильный паттерн A1 — AI предлагает, инженер ревьюит, симулятор валидирует, проверка безопасности пропускает только то, что прошло, и только тогда — развёртывание. Структурное ограничение: ИИ-генерация PLC-кода применима, только если есть симулятор для валидации, протоколы безопасности перед развёртыванием, инженер с правом veto.</a:t>
             </a:r>
           </a:p>
         </p:txBody>
@@ -6788,8 +6788,8 @@
         </p:blipFill>
         <p:spPr>
           <a:xfrm>
-            <a:off x="457200" y="457200"/>
-            <a:ext cx="5943600" cy="5486400"/>
+            <a:off x="365760" y="457200"/>
+            <a:ext cx="6126480" cy="5486400"/>
           </a:xfrm>
           <a:prstGeom prst="rect">
             <a:avLst/>
@@ -6804,8 +6804,8 @@
         </p:nvSpPr>
         <p:spPr>
           <a:xfrm>
-            <a:off x="457200" y="5989320"/>
-            <a:ext cx="5943600" cy="274320"/>
+            <a:off x="365760" y="5989320"/>
+            <a:ext cx="6126480" cy="274320"/>
           </a:xfrm>
           <a:prstGeom prst="rect">
             <a:avLst/>
@@ -7178,7 +7178,7 @@
                 </a:solidFill>
                 <a:latin typeface="Arial"/>
               </a:rPr>
-              <a:t>Курс «Применение AI в инженерии» · 75 минут + Q&amp;A</a:t>
+              <a:t>Курс «Применение AI в инженерии»</a:t>
             </a:r>
           </a:p>
         </p:txBody>
@@ -7282,7 +7282,7 @@
                 </a:solidFill>
                 <a:latin typeface="Arial"/>
               </a:rPr>
-              <a:t>Если хотя бы один ответ «нет» — пилот = деньги на ветер (урок Southeast Asian Port)</a:t>
+              <a:t>Если хотя бы один ответ «нет» — пилот = деньги на ветер (урок анонимного порта 2024)</a:t>
             </a:r>
           </a:p>
         </p:txBody>
@@ -7491,7 +7491,7 @@
                 </a:solidFill>
                 <a:latin typeface="Arial"/>
               </a:rPr>
-              <a:t>Без этого ML не отличает сезонные сдвиги от долгосрочных трендов</a:t>
+              <a:t>Без этого машинное обучение не отличает сезонные сдвиги от долгосрочных трендов</a:t>
             </a:r>
           </a:p>
         </p:txBody>
@@ -7661,7 +7661,7 @@
                 </a:solidFill>
                 <a:latin typeface="Arial"/>
               </a:rPr>
-              <a:t>Sampling rate ≥10× выше полоса управления?</a:t>
+              <a:t>Частота опроса датчиков ≥10× выше полосы управления?</a:t>
             </a:r>
           </a:p>
         </p:txBody>
@@ -8079,7 +8079,7 @@
                 </a:solidFill>
                 <a:latin typeface="Arial"/>
               </a:rPr>
-              <a:t>Drift датчиков калиброван и логируется?</a:t>
+              <a:t>Дрейф датчиков калибруется и журналируется?</a:t>
             </a:r>
           </a:p>
         </p:txBody>
@@ -8288,7 +8288,7 @@
                 </a:solidFill>
                 <a:latin typeface="Arial"/>
               </a:rPr>
-              <a:t>Назначен governance owner для данных?</a:t>
+              <a:t>Назначен ответственный за управление данными?</a:t>
             </a:r>
           </a:p>
         </p:txBody>
@@ -8327,7 +8327,7 @@
                 </a:solidFill>
                 <a:latin typeface="Arial"/>
               </a:rPr>
-              <a:t>Кто отвечает за схему, доступ, retention, конфиденциальность</a:t>
+              <a:t>Кто отвечает за схему, доступ, срок хранения, конфиденциальность</a:t>
             </a:r>
           </a:p>
         </p:txBody>
@@ -8475,7 +8475,7 @@
                 </a:solidFill>
                 <a:latin typeface="Arial"/>
               </a:rPr>
-              <a:t>1. DT-2026</a:t>
+              <a:t>1. Двойник 2026</a:t>
             </a:r>
           </a:p>
         </p:txBody>
@@ -9214,7 +9214,7 @@
                 </a:solidFill>
                 <a:latin typeface="Arial"/>
               </a:rPr>
-              <a:t>Раздел 2 · 3 слайда · 10 минут</a:t>
+              <a:t>Раздел 2 · нижняя ступень шкалы автономии</a:t>
             </a:r>
           </a:p>
         </p:txBody>
@@ -9279,7 +9279,7 @@
                 </a:solidFill>
                 <a:latin typeface="Arial"/>
               </a:rPr>
-              <a:t>Vision QC tuned 99%+ при ложных срабатываниях 0,1–2%</a:t>
+              <a:t>Vision QC в отлаженных системах: ≥99% при ложных срабатываниях 0,1–2%</a:t>
             </a:r>
           </a:p>
         </p:txBody>
@@ -9318,7 +9318,7 @@
                 </a:solidFill>
                 <a:latin typeface="Arial"/>
               </a:rPr>
-              <a:t>Но даже 1% FP × 10 000 деталей = 100 годных отвергнуто за смену — каскад срабатываний</a:t>
+              <a:t>Но даже 1% ложных срабатываний × 10 000 деталей = 100 годных отвергнуто за смену — каскад срабатываний</a:t>
             </a:r>
           </a:p>
         </p:txBody>
@@ -9509,7 +9509,7 @@
                 </a:solidFill>
                 <a:latin typeface="Arial"/>
               </a:rPr>
-              <a:t>за смену 1% × 10 000</a:t>
+              <a:t>за смену: 1% × 10 000</a:t>
             </a:r>
           </a:p>
           <a:p>
@@ -9557,7 +9557,7 @@
                 </a:solidFill>
                 <a:latin typeface="Arial"/>
               </a:rPr>
-              <a:t>→ sort cost растёт</a:t>
+              <a:t>→ растёт стоимость пересортировки</a:t>
             </a:r>
           </a:p>
           <a:p>
@@ -9573,7 +9573,7 @@
                 </a:solidFill>
                 <a:latin typeface="Arial"/>
               </a:rPr>
-              <a:t>→ throughput loss</a:t>
+              <a:t>→ падает пропускная способность</a:t>
             </a:r>
           </a:p>
           <a:p>
@@ -9589,7 +9589,7 @@
                 </a:solidFill>
                 <a:latin typeface="Arial"/>
               </a:rPr>
-              <a:t>→ оператор начинает override</a:t>
+              <a:t>→ оператор начинает игнорировать AI</a:t>
             </a:r>
           </a:p>
           <a:p>
@@ -9644,7 +9644,7 @@
                 </a:solidFill>
                 <a:latin typeface="Arial"/>
               </a:rPr>
-              <a:t>Indus Vision / Jidoka 2026 · Overview.ai 2026 · vendor benchmarks tuned systems</a:t>
+              <a:t>Indus Vision / Jidoka 2026 · Overview.ai 2026 · бенчмарки вендоров для отлаженных систем</a:t>
             </a:r>
           </a:p>
         </p:txBody>
@@ -9939,7 +9939,7 @@
                 </a:solidFill>
                 <a:latin typeface="Arial"/>
               </a:rPr>
-              <a:t>Cement plant</a:t>
+              <a:t>Цементный завод</a:t>
             </a:r>
           </a:p>
           <a:p>
@@ -9955,7 +9955,7 @@
                 </a:solidFill>
                 <a:latin typeface="Arial"/>
               </a:rPr>
-              <a:t>57× ROI за 6 месяцев</a:t>
+              <a:t>57× окупаемость за 6 месяцев</a:t>
             </a:r>
           </a:p>
           <a:p>
@@ -9971,7 +9971,7 @@
                 </a:solidFill>
                 <a:latin typeface="Arial"/>
               </a:rPr>
-              <a:t>software-only monitoring</a:t>
+              <a:t>мониторинг без замены оборудования</a:t>
             </a:r>
           </a:p>
           <a:p>
@@ -10003,7 +10003,7 @@
                 </a:solidFill>
                 <a:latin typeface="Arial"/>
               </a:rPr>
-              <a:t>Chemical plant</a:t>
+              <a:t>Химический завод</a:t>
             </a:r>
           </a:p>
           <a:p>
@@ -10067,7 +10067,7 @@
                 </a:solidFill>
                 <a:latin typeface="Arial"/>
               </a:rPr>
-              <a:t>Программа PdM:</a:t>
+              <a:t>Программа прогн. обслуживания:</a:t>
             </a:r>
           </a:p>
           <a:p>
@@ -10444,7 +10444,7 @@
                 </a:solidFill>
                 <a:latin typeface="Arial"/>
               </a:rPr>
-              <a:t>Vision разрешает 0,01-0,1 мм; камера не видит микрометровых отклонений.</a:t>
+              <a:t>Камера разрешает 0,01–0,1 мм; не видит микрометровых отклонений.</a:t>
             </a:r>
           </a:p>
           <a:p>
@@ -10492,7 +10492,7 @@
                 </a:solidFill>
                 <a:latin typeface="Arial"/>
               </a:rPr>
-              <a:t>· Метрология (laser scanner, CMM)</a:t>
+              <a:t>· Метрология (лазерный сканер, КИМ)</a:t>
             </a:r>
           </a:p>
           <a:p>
@@ -10508,7 +10508,7 @@
                 </a:solidFill>
                 <a:latin typeface="Arial"/>
               </a:rPr>
-              <a:t>· GD&amp;T — Geometric Dimensioning &amp; Tolerancing</a:t>
+              <a:t>· GD&amp;T — геометрические допуски</a:t>
             </a:r>
           </a:p>
           <a:p>
@@ -10524,7 +10524,7 @@
                 </a:solidFill>
                 <a:latin typeface="Arial"/>
               </a:rPr>
-              <a:t>· SPC — Statistical Process Control</a:t>
+              <a:t>· SPC — статистическое управление процессом</a:t>
             </a:r>
           </a:p>
           <a:p>
@@ -10742,7 +10742,7 @@
                 </a:solidFill>
                 <a:latin typeface="Arial"/>
               </a:rPr>
-              <a:t>Выборка отказов &lt;30 — ML без статистики не учится; галлюцинирует patterns в шуме.</a:t>
+              <a:t>Выборка отказов &lt;30 — машинное обучение без статистики не учится; галлюцинирует закономерности в шуме.</a:t>
             </a:r>
           </a:p>
           <a:p>
@@ -10790,7 +10790,7 @@
                 </a:solidFill>
                 <a:latin typeface="Arial"/>
               </a:rPr>
-              <a:t>· Физическая симуляция (FEA, износ)</a:t>
+              <a:t>· Физическая симуляция (МКЭ, износ)</a:t>
             </a:r>
           </a:p>
           <a:p>
@@ -10806,7 +10806,7 @@
                 </a:solidFill>
                 <a:latin typeface="Arial"/>
               </a:rPr>
-              <a:t>· RCM — Reliability-Centered Maintenance</a:t>
+              <a:t>· RCM — обслуживание, ориентированное на надёжность</a:t>
             </a:r>
           </a:p>
           <a:p>
@@ -10854,7 +10854,7 @@
                 </a:solidFill>
                 <a:latin typeface="Arial"/>
               </a:rPr>
-              <a:t>Якорь: «методология Nowlan-Heap 1978 из авиации работает там, где ML — нет».</a:t>
+              <a:t>Якорь: «методология Nowlan–Heap 1978 из авиации работает там, где ML — нет».</a:t>
             </a:r>
           </a:p>
         </p:txBody>
@@ -10941,7 +10941,7 @@
                 </a:solidFill>
                 <a:latin typeface="Arial"/>
               </a:rPr>
-              <a:t>MTBF (Mean Time Between Failures) · GD&amp;T · SPC · RCM — четыре альтернативных инструмента вместо AI</a:t>
+              <a:t>MTBF (среднее время между отказами) · GD&amp;T · SPC · RCM — четыре альтернативных инструмента вместо AI</a:t>
             </a:r>
           </a:p>
         </p:txBody>
@@ -11050,7 +11050,7 @@
                 </a:solidFill>
                 <a:latin typeface="Arial"/>
               </a:rPr>
-              <a:t>1. DT-2026</a:t>
+              <a:t>1. Двойник 2026</a:t>
             </a:r>
           </a:p>
         </p:txBody>
@@ -11789,7 +11789,7 @@
                 </a:solidFill>
                 <a:latin typeface="Arial"/>
               </a:rPr>
-              <a:t>Раздел 3 · 3 слайда · 10 минут</a:t>
+              <a:t>Раздел 3 · советующий режим с инженером в петле</a:t>
             </a:r>
           </a:p>
         </p:txBody>
@@ -11893,7 +11893,7 @@
                 </a:solidFill>
                 <a:latin typeface="Arial"/>
               </a:rPr>
-              <a:t>Зрелые применения A1: рекомендации по последовательности операций, energy-aware scheduling, ML на SCADA-логах</a:t>
+              <a:t>Зрелые применения A1: рекомендации по последовательности операций, планирование с учётом энергии, ML на журналах SCADA</a:t>
             </a:r>
           </a:p>
         </p:txBody>
@@ -12084,7 +12084,7 @@
                 </a:solidFill>
                 <a:latin typeface="Arial"/>
               </a:rPr>
-              <a:t>MES советующий режим:</a:t>
+              <a:t>MES в советующем режиме:</a:t>
             </a:r>
           </a:p>
           <a:p>
@@ -12116,7 +12116,7 @@
                 </a:solidFill>
                 <a:latin typeface="Arial"/>
               </a:rPr>
-              <a:t>· energy-aware scheduling</a:t>
+              <a:t>· планирование с учётом энергии</a:t>
             </a:r>
           </a:p>
           <a:p>
@@ -12180,7 +12180,7 @@
                 </a:solidFill>
                 <a:latin typeface="Arial"/>
               </a:rPr>
-              <a:t>· ML на исторических SCADA-логах</a:t>
+              <a:t>· ML на исторических журналах SCADA</a:t>
             </a:r>
           </a:p>
           <a:p>
@@ -12299,7 +12299,7 @@
                 </a:solidFill>
                 <a:latin typeface="Arial"/>
               </a:rPr>
-              <a:t>Devox / iFactoryApp 2026 · Siemens Opcenter + Rockwell FactoryTalk product docs</a:t>
+              <a:t>Devox / iFactoryApp 2026 · документация Siemens Opcenter + Rockwell FactoryTalk</a:t>
             </a:r>
           </a:p>
         </p:txBody>
@@ -12364,7 +12364,7 @@
                 </a:solidFill>
                 <a:latin typeface="Arial"/>
               </a:rPr>
-              <a:t>PLC Copilot vs ChatGPT: 85% точности vs нелегальный адрес</a:t>
+              <a:t>PLC Copilot vs ChatGPT: 85% точности vs остановка контроллера</a:t>
             </a:r>
           </a:p>
         </p:txBody>
@@ -12403,7 +12403,7 @@
                 </a:solidFill>
                 <a:latin typeface="Arial"/>
               </a:rPr>
-              <a:t>Purpose-built tools работают; generic LLM на низком уровне (PLC) — провал</a:t>
+              <a:t>Специализированные инструменты работают; универсальная языковая модель на PLC — провал</a:t>
             </a:r>
           </a:p>
         </p:txBody>
@@ -12534,7 +12534,7 @@
                 </a:solidFill>
                 <a:latin typeface="Arial"/>
               </a:rPr>
-              <a:t>PLC Copilot · purpose-built</a:t>
+              <a:t>PLC Copilot · специализированный</a:t>
             </a:r>
           </a:p>
         </p:txBody>
@@ -12589,7 +12589,7 @@
                 </a:solidFill>
                 <a:latin typeface="Arial"/>
               </a:rPr>
-              <a:t>Знает IEC 61131-3 (ladder, structured text, FBD).</a:t>
+              <a:t>Знает IEC 61131-3 (релейная логика, структурированный текст, FBD).</a:t>
             </a:r>
           </a:p>
           <a:p>
@@ -12717,7 +12717,7 @@
                 </a:solidFill>
                 <a:latin typeface="Arial"/>
               </a:rPr>
-              <a:t>85% — с инженер в петле</a:t>
+              <a:t>85% — с инженером в петле</a:t>
             </a:r>
           </a:p>
           <a:p>
@@ -12864,7 +12864,7 @@
                 </a:solidFill>
                 <a:latin typeface="Arial"/>
               </a:rPr>
-              <a:t>ChatGPT generic · ПРОВАЛ</a:t>
+              <a:t>ChatGPT универсальный · ПРОВАЛ</a:t>
             </a:r>
           </a:p>
         </p:txBody>
@@ -12967,7 +12967,7 @@
                 </a:solidFill>
                 <a:latin typeface="Arial"/>
               </a:rPr>
-              <a:t>M-область в Siemens S7-1500 ограничена до M65535.</a:t>
+              <a:t>Область M в Siemens S7-1500 физически ограничена до M65535.</a:t>
             </a:r>
           </a:p>
           <a:p>
@@ -12983,7 +12983,7 @@
                 </a:solidFill>
                 <a:latin typeface="Arial"/>
               </a:rPr>
-              <a:t>Адрес %M99999 не существует — PLC откажется компилировать.</a:t>
+              <a:t>Код скомпилируется в TIA Portal без ошибок,</a:t>
             </a:r>
           </a:p>
           <a:p>
@@ -12993,12 +12993,28 @@
               </a:lnSpc>
             </a:pPr>
             <a:r>
-              <a:rPr sz="800" b="0" i="0">
+              <a:rPr sz="1200" b="0" i="0">
                 <a:solidFill>
                   <a:srgbClr val="21295C"/>
                 </a:solidFill>
                 <a:latin typeface="Arial"/>
               </a:rPr>
+              <a:t>но в режиме исполнения PLC уходит в STOP-mode — остановка всего оборудования.</a:t>
+            </a:r>
+          </a:p>
+          <a:p>
+            <a:pPr algn="l">
+              <a:lnSpc>
+                <a:spcPct val="130000"/>
+              </a:lnSpc>
+            </a:pPr>
+            <a:r>
+              <a:rPr sz="600" b="0" i="0">
+                <a:solidFill>
+                  <a:srgbClr val="21295C"/>
+                </a:solidFill>
+                <a:latin typeface="Arial"/>
+              </a:rPr>
               <a:t/>
             </a:r>
           </a:p>
@@ -13031,7 +13047,7 @@
                 </a:solidFill>
                 <a:latin typeface="Arial"/>
               </a:rPr>
-              <a:t>Generic LLM не знает циклическое исполнение, не знает legal addresses конкретной модели.</a:t>
+              <a:t>Универсальная языковая модель не знает циклическое исполнение и допустимые адреса конкретной модели.</a:t>
             </a:r>
           </a:p>
           <a:p>
@@ -13041,7 +13057,7 @@
               </a:lnSpc>
             </a:pPr>
             <a:r>
-              <a:rPr sz="600" b="0" i="0">
+              <a:rPr sz="400" b="0" i="0">
                 <a:solidFill>
                   <a:srgbClr val="21295C"/>
                 </a:solidFill>
@@ -13063,7 +13079,7 @@
                 </a:solidFill>
                 <a:latin typeface="Arial"/>
               </a:rPr>
-              <a:t>Это структурное ограничение, не «временный баг».</a:t>
+              <a:t>Это структурное ограничение, не «временный сбой».</a:t>
             </a:r>
           </a:p>
         </p:txBody>
@@ -13128,7 +13144,7 @@
                 </a:solidFill>
                 <a:latin typeface="Arial"/>
               </a:rPr>
-              <a:t>Архитектура инженер в петле: безопасный паттерн A1</a:t>
+              <a:t>Архитектура «инженер в петле»: безопасный паттерн A1</a:t>
             </a:r>
           </a:p>
         </p:txBody>
@@ -13167,7 +13183,7 @@
                 </a:solidFill>
                 <a:latin typeface="Arial"/>
               </a:rPr>
-              <a:t>AI предлагает → инженер ревьюит → симуляция → проверка безопасности → PLC deploy</a:t>
+              <a:t>AI предлагает → инженер проверяет → симуляция → проверка безопасности → загрузка в PLC</a:t>
             </a:r>
           </a:p>
         </p:txBody>
@@ -13552,8 +13568,8 @@
                 </a:solidFill>
                 <a:latin typeface="Arial"/>
               </a:rPr>
-              <a:t>ревьюит
-+ корректирует</a:t>
+              <a:t>проверяет
+и корректирует</a:t>
             </a:r>
           </a:p>
         </p:txBody>
@@ -13768,7 +13784,7 @@
                 <a:latin typeface="Arial"/>
               </a:rPr>
               <a:t>валидирует
-на twin</a:t>
+на двойнике</a:t>
             </a:r>
           </a:p>
         </p:txBody>
@@ -13943,7 +13959,7 @@
                 </a:solidFill>
                 <a:latin typeface="Arial"/>
               </a:rPr>
-              <a:t>Safety check</a:t>
+              <a:t>Безопасность</a:t>
             </a:r>
           </a:p>
         </p:txBody>
@@ -13983,7 +13999,7 @@
                 <a:latin typeface="Arial"/>
               </a:rPr>
               <a:t>IEC 61131-3
-+ test cases</a:t>
++ тестовые сценарии</a:t>
             </a:r>
           </a:p>
         </p:txBody>
@@ -14158,7 +14174,7 @@
                 </a:solidFill>
                 <a:latin typeface="Arial"/>
               </a:rPr>
-              <a:t>PLC deploy</a:t>
+              <a:t>Загрузка в PLC</a:t>
             </a:r>
           </a:p>
         </p:txBody>
@@ -14198,7 +14214,7 @@
                 <a:latin typeface="Arial"/>
               </a:rPr>
               <a:t>только если
-все passed</a:t>
+все шаги пройдены</a:t>
             </a:r>
           </a:p>
         </p:txBody>
@@ -14301,7 +14317,7 @@
                 </a:solidFill>
                 <a:latin typeface="Arial"/>
               </a:rPr>
-              <a:t>(а) есть симулятор / twin для валидации до deployment</a:t>
+              <a:t>(а) есть симулятор или двойник для валидации до развёртывания</a:t>
             </a:r>
           </a:p>
           <a:p>
@@ -14317,7 +14333,7 @@
                 </a:solidFill>
                 <a:latin typeface="Arial"/>
               </a:rPr>
-              <a:t>(б) есть safety-протоколы перед deployment (IEC 61508 SIL 2/3 для критичных контуров)</a:t>
+              <a:t>(б) есть протоколы безопасности перед развёртыванием (IEC 61508 SIL 2/3 для критичных контуров)</a:t>
             </a:r>
           </a:p>
           <a:p>
@@ -14481,7 +14497,7 @@
                 </a:solidFill>
                 <a:latin typeface="Arial"/>
               </a:rPr>
-              <a:t>1. DT-2026</a:t>
+              <a:t>1. Двойник 2026</a:t>
             </a:r>
           </a:p>
         </p:txBody>
@@ -15188,7 +15204,7 @@
                 </a:solidFill>
                 <a:latin typeface="Arial"/>
               </a:rPr>
-              <a:t>Yokogawa FKDPP · twin как песочница · разрыв «симуляция → реальность» · MPC альтернатива</a:t>
+              <a:t>Yokogawa FKDPP · двойник как песочница · разрыв «симуляция → реальность» · MPC альтернатива</a:t>
             </a:r>
           </a:p>
           <a:p>
@@ -15220,7 +15236,7 @@
                 </a:solidFill>
                 <a:latin typeface="Arial"/>
               </a:rPr>
-              <a:t>Раздел 4 · 4 слайда · 10 минут</a:t>
+              <a:t>Раздел 4 · замыкание петли с архитектурой двойника</a:t>
             </a:r>
           </a:p>
         </p:txBody>
@@ -15329,7 +15345,7 @@
                 </a:solidFill>
                 <a:latin typeface="Arial"/>
               </a:rPr>
-              <a:t>1. DT-2026</a:t>
+              <a:t>1. Двойник 2026</a:t>
             </a:r>
           </a:p>
         </p:txBody>
@@ -16091,7 +16107,7 @@
                 </a:solidFill>
                 <a:latin typeface="Arial"/>
               </a:rPr>
-              <a:t>Модуль 2 · 75 минут + Q&amp;A</a:t>
+              <a:t>Модуль 2 · Промышленный AI и автоматизация</a:t>
             </a:r>
           </a:p>
           <a:p>
@@ -16330,7 +16346,7 @@
                 </a:solidFill>
                 <a:latin typeface="Arial"/>
               </a:rPr>
-              <a:t>Yokogawa FKDPP в JSR: 35 дней RL в chemical plant, 2022</a:t>
+              <a:t>Yokogawa FKDPP в JSR: 35 дней RL на химзаводе, 2022</a:t>
             </a:r>
           </a:p>
         </p:txBody>
@@ -16432,7 +16448,7 @@
                 </a:solidFill>
                 <a:latin typeface="Arial"/>
               </a:rPr>
-              <a:t>Distillation towers · Wikimedia · CC-BY-SA · аналогичная JSR колонна</a:t>
+              <a:t>Дистилляционные колонны · Wikimedia · CC-BY-SA · аналог JSR</a:t>
             </a:r>
           </a:p>
         </p:txBody>
@@ -16535,7 +16551,7 @@
                 </a:solidFill>
                 <a:latin typeface="Arial"/>
               </a:rPr>
-              <a:t>Factorial Kernel Dynamic</a:t>
+              <a:t>Факториальное ядровое</a:t>
             </a:r>
           </a:p>
           <a:p>
@@ -16551,7 +16567,7 @@
                 </a:solidFill>
                 <a:latin typeface="Arial"/>
               </a:rPr>
-              <a:t>Policy Programming</a:t>
+              <a:t>динамическое программирование политик</a:t>
             </a:r>
           </a:p>
           <a:p>
@@ -16583,7 +16599,7 @@
                 </a:solidFill>
                 <a:latin typeface="Arial"/>
               </a:rPr>
-              <a:t>NAIST 2018 · off-policy RL</a:t>
+              <a:t>Yokogawa + NAIST, 2018 · off-policy RL</a:t>
             </a:r>
           </a:p>
           <a:p>
@@ -16615,7 +16631,7 @@
                 </a:solidFill>
                 <a:latin typeface="Arial"/>
               </a:rPr>
-              <a:t>премия премьер-министра Японии 2023</a:t>
+              <a:t>отмечено индустриальными наградами</a:t>
             </a:r>
           </a:p>
           <a:p>
@@ -16679,7 +16695,7 @@
                 </a:solidFill>
                 <a:latin typeface="Arial"/>
               </a:rPr>
-              <a:t>· колонна дистилляции — A2 замкнутая петля</a:t>
+              <a:t>· дистилляционная колонна — A2 замкнутая петля</a:t>
             </a:r>
           </a:p>
           <a:p>
@@ -16743,7 +16759,7 @@
                 </a:solidFill>
                 <a:latin typeface="Arial"/>
               </a:rPr>
-              <a:t>Yokogawa имела внутренний twin колонны — RL обучался в симуляции ДО переноса.</a:t>
+              <a:t>Yokogawa имела внутренний двойник колонны — RL обучался в симуляции ДО переноса.</a:t>
             </a:r>
           </a:p>
         </p:txBody>
@@ -17080,7 +17096,7 @@
                 </a:solidFill>
                 <a:latin typeface="Arial"/>
               </a:rPr>
-              <a:t>1. Twin</a:t>
+              <a:t>1. Двойник</a:t>
             </a:r>
           </a:p>
         </p:txBody>
@@ -17250,7 +17266,7 @@
                 </a:solidFill>
                 <a:latin typeface="Arial"/>
               </a:rPr>
-              <a:t>2. RL агент</a:t>
+              <a:t>2. RL-агент</a:t>
             </a:r>
           </a:p>
         </p:txBody>
@@ -17289,7 +17305,7 @@
                 </a:solidFill>
                 <a:latin typeface="Arial"/>
               </a:rPr>
-              <a:t>обучается на 1000+ эпизодов симуляции — БЕЗ РИСКА железу</a:t>
+              <a:t>обучается на 1000+ эпизодов симуляции — БЕЗ РИСКА для железа</a:t>
             </a:r>
           </a:p>
         </p:txBody>
@@ -17459,7 +17475,7 @@
                 </a:solidFill>
                 <a:latin typeface="Arial"/>
               </a:rPr>
-              <a:t>edge cases · sensitivity analysis · безопасная зона действия</a:t>
+              <a:t>краевые случаи · анализ чувствительности · безопасная зона действия</a:t>
             </a:r>
           </a:p>
         </p:txBody>
@@ -17629,7 +17645,7 @@
                 </a:solidFill>
                 <a:latin typeface="Arial"/>
               </a:rPr>
-              <a:t>RL policy → реальное оборудование с теневой режим</a:t>
+              <a:t>политика RL → реальное оборудование в теневом режиме</a:t>
             </a:r>
           </a:p>
         </p:txBody>
@@ -17799,7 +17815,7 @@
                 </a:solidFill>
                 <a:latin typeface="Arial"/>
               </a:rPr>
-              <a:t>если сдвиг распределения — снимаем RL, твердый PLC берёт управление</a:t>
+              <a:t>если сдвиг распределения — снимаем RL, проводной PLC берёт управление</a:t>
             </a:r>
           </a:p>
         </p:txBody>
@@ -17903,7 +17919,7 @@
                 </a:solidFill>
                 <a:latin typeface="Arial"/>
               </a:rPr>
-              <a:t>Симуляция не моделировала тепловые потери и surface fouling; RL excursion на 10% от штатного режима</a:t>
+              <a:t>Симуляция не моделировала тепловые потери и поверхностное загрязнение; выход RL за пределы — 10% от штатного режима</a:t>
             </a:r>
           </a:p>
         </p:txBody>
@@ -18094,7 +18110,7 @@
                 </a:solidFill>
                 <a:latin typeface="Arial"/>
               </a:rPr>
-              <a:t>· Surface fouling — отложения на стенках колонны со временем</a:t>
+              <a:t>· Поверхностное загрязнение — отложения на стенках колонны со временем</a:t>
             </a:r>
           </a:p>
           <a:p>
@@ -18158,7 +18174,7 @@
                 </a:solidFill>
                 <a:latin typeface="Arial"/>
               </a:rPr>
-              <a:t>· Дрейф сенсоров — без калибровки T-датчики «уходят»</a:t>
+              <a:t>· Дрейф датчиков — без калибровки термопары «уходят»</a:t>
             </a:r>
           </a:p>
           <a:p>
@@ -18206,7 +18222,7 @@
                 </a:solidFill>
                 <a:latin typeface="Arial"/>
               </a:rPr>
-              <a:t>Excursion на 10% от штатного режима за 60 дней.</a:t>
+              <a:t>Выход за пределы режима — 10% от штатного за 60 дней.</a:t>
             </a:r>
           </a:p>
           <a:p>
@@ -18254,7 +18270,7 @@
                 </a:solidFill>
                 <a:latin typeface="Arial"/>
               </a:rPr>
-              <a:t>Симуляция дешевле и быстрее, но missing real-life информация.</a:t>
+              <a:t>Симуляция дешевле и быстрее, но без реальной физики не учитывает износ.</a:t>
             </a:r>
           </a:p>
         </p:txBody>
@@ -18293,7 +18309,7 @@
                 </a:solidFill>
                 <a:latin typeface="Arial"/>
               </a:rPr>
-              <a:t>MDPI Processes 2025 · concrete пример разрыв «симуляция → реальность»</a:t>
+              <a:t>MDPI Processes 2025 · конкретный пример разрыва «симуляция → реальность»</a:t>
             </a:r>
           </a:p>
         </p:txBody>
@@ -18561,7 +18577,7 @@
               </a:lnSpc>
             </a:pPr>
             <a:r>
-              <a:rPr sz="1200" b="1" i="0">
+              <a:rPr sz="1300" b="1" i="0">
                 <a:solidFill>
                   <a:srgbClr val="1C7293"/>
                 </a:solidFill>
@@ -18577,13 +18593,13 @@
               </a:lnSpc>
             </a:pPr>
             <a:r>
-              <a:rPr sz="1200" b="0" i="0">
+              <a:rPr sz="1300" b="0" i="0">
                 <a:solidFill>
                   <a:srgbClr val="21295C"/>
                 </a:solidFill>
                 <a:latin typeface="Arial"/>
               </a:rPr>
-              <a:t>· Нет журнал аудита для регулятора</a:t>
+              <a:t>· Нет журнала аудита для регулятора</a:t>
             </a:r>
           </a:p>
           <a:p>
@@ -18593,13 +18609,13 @@
               </a:lnSpc>
             </a:pPr>
             <a:r>
-              <a:rPr sz="1200" b="0" i="0">
+              <a:rPr sz="1300" b="0" i="0">
                 <a:solidFill>
                   <a:srgbClr val="21295C"/>
                 </a:solidFill>
                 <a:latin typeface="Arial"/>
               </a:rPr>
-              <a:t>· Недетерминированный output несовместим с IEC 61508 SIL 2/3</a:t>
+              <a:t>· Недетерминированный вывод несовместим с IEC 61508 SIL 2/3</a:t>
             </a:r>
           </a:p>
           <a:p>
@@ -18609,13 +18625,13 @@
               </a:lnSpc>
             </a:pPr>
             <a:r>
-              <a:rPr sz="1200" b="0" i="0">
+              <a:rPr sz="1300" b="0" i="0">
                 <a:solidFill>
                   <a:srgbClr val="21295C"/>
                 </a:solidFill>
                 <a:latin typeface="Arial"/>
               </a:rPr>
-              <a:t>· Не покрывает edge cases по definition</a:t>
+              <a:t>· Не покрывает краевые случаи по определению</a:t>
             </a:r>
           </a:p>
           <a:p>
@@ -18641,13 +18657,61 @@
               </a:lnSpc>
             </a:pPr>
             <a:r>
+              <a:rPr sz="1400" b="1" i="0">
+                <a:solidFill>
+                  <a:srgbClr val="F0AB00"/>
+                </a:solidFill>
+                <a:latin typeface="Arial"/>
+              </a:rPr>
+              <a:t>АЛЬТЕРНАТИВА:</a:t>
+            </a:r>
+          </a:p>
+          <a:p>
+            <a:pPr algn="l">
+              <a:lnSpc>
+                <a:spcPct val="130000"/>
+              </a:lnSpc>
+            </a:pPr>
+            <a:r>
+              <a:rPr sz="1300" b="0" i="0">
+                <a:solidFill>
+                  <a:srgbClr val="21295C"/>
+                </a:solidFill>
+                <a:latin typeface="Arial"/>
+              </a:rPr>
+              <a:t>· Проводной PLC + IEC 61508 SIL 2/3</a:t>
+            </a:r>
+          </a:p>
+          <a:p>
+            <a:pPr algn="l">
+              <a:lnSpc>
+                <a:spcPct val="130000"/>
+              </a:lnSpc>
+            </a:pPr>
+            <a:r>
+              <a:rPr sz="1300" b="0" i="0">
+                <a:solidFill>
+                  <a:srgbClr val="21295C"/>
+                </a:solidFill>
+                <a:latin typeface="Arial"/>
+              </a:rPr>
+              <a:t>· Формальная верификация (TLA+, SPIN, Coq, SCADE)</a:t>
+            </a:r>
+          </a:p>
+          <a:p>
+            <a:pPr algn="l">
+              <a:lnSpc>
+                <a:spcPct val="130000"/>
+              </a:lnSpc>
+            </a:pPr>
+            <a:r>
               <a:rPr sz="1300" b="1" i="0">
                 <a:solidFill>
-                  <a:srgbClr val="F0AB00"/>
-                </a:solidFill>
-                <a:latin typeface="Arial"/>
-              </a:rPr>
-              <a:t>АЛЬТЕРНАТИВА:</a:t>
+                  <a:srgbClr val="21295C"/>
+                </a:solidFill>
+                <a:latin typeface="Arial"/>
+              </a:rPr>
+              <a:t>· SIL 2 = 10⁻⁶..10⁻⁷ отказов/час</a:t>
             </a:r>
           </a:p>
           <a:p>
@@ -18657,45 +18721,13 @@
               </a:lnSpc>
             </a:pPr>
             <a:r>
-              <a:rPr sz="1200" b="0" i="0">
+              <a:rPr sz="1300" b="1" i="0">
                 <a:solidFill>
                   <a:srgbClr val="21295C"/>
                 </a:solidFill>
                 <a:latin typeface="Arial"/>
               </a:rPr>
-              <a:t>· Hardwired PLC + IEC 61508 SIL 2/3</a:t>
-            </a:r>
-          </a:p>
-          <a:p>
-            <a:pPr algn="l">
-              <a:lnSpc>
-                <a:spcPct val="130000"/>
-              </a:lnSpc>
-            </a:pPr>
-            <a:r>
-              <a:rPr sz="1200" b="0" i="0">
-                <a:solidFill>
-                  <a:srgbClr val="21295C"/>
-                </a:solidFill>
-                <a:latin typeface="Arial"/>
-              </a:rPr>
-              <a:t>· Формальная верификация (TLA+, SPIN, Coq, SCADE)</a:t>
-            </a:r>
-          </a:p>
-          <a:p>
-            <a:pPr algn="l">
-              <a:lnSpc>
-                <a:spcPct val="130000"/>
-              </a:lnSpc>
-            </a:pPr>
-            <a:r>
-              <a:rPr sz="1100" b="0" i="1">
-                <a:solidFill>
-                  <a:srgbClr val="6B7685"/>
-                </a:solidFill>
-                <a:latin typeface="Arial"/>
-              </a:rPr>
-              <a:t>· SIL 2 = 10⁻⁶..10⁻⁷ отказов/час; SIL 3 = 10⁻⁷..10⁻⁸</a:t>
+              <a:t>· SIL 3 = 10⁻⁷..10⁻⁸ отказов/час</a:t>
             </a:r>
           </a:p>
         </p:txBody>
@@ -18865,7 +18897,7 @@
                 </a:solidFill>
                 <a:latin typeface="Arial"/>
               </a:rPr>
-              <a:t>Если уравнения известны (Навье-Стокса, теплоперенос, химическая кинетика):</a:t>
+              <a:t>Если уравнения известны (Навье–Стокса, теплоперенос, химическая кинетика):</a:t>
             </a:r>
           </a:p>
           <a:p>
@@ -18875,6 +18907,38 @@
               </a:lnSpc>
             </a:pPr>
             <a:r>
+              <a:rPr sz="400" b="0" i="0">
+                <a:solidFill>
+                  <a:srgbClr val="21295C"/>
+                </a:solidFill>
+                <a:latin typeface="Arial"/>
+              </a:rPr>
+              <a:t/>
+            </a:r>
+          </a:p>
+          <a:p>
+            <a:pPr algn="l">
+              <a:lnSpc>
+                <a:spcPct val="130000"/>
+              </a:lnSpc>
+            </a:pPr>
+            <a:r>
+              <a:rPr sz="1500" b="1" i="0">
+                <a:solidFill>
+                  <a:srgbClr val="21295C"/>
+                </a:solidFill>
+                <a:latin typeface="Arial"/>
+              </a:rPr>
+              <a:t>MPC — Модельное предиктивное управление</a:t>
+            </a:r>
+          </a:p>
+          <a:p>
+            <a:pPr algn="l">
+              <a:lnSpc>
+                <a:spcPct val="130000"/>
+              </a:lnSpc>
+            </a:pPr>
+            <a:r>
               <a:rPr sz="600" b="0" i="0">
                 <a:solidFill>
                   <a:srgbClr val="21295C"/>
@@ -18891,13 +18955,29 @@
               </a:lnSpc>
             </a:pPr>
             <a:r>
-              <a:rPr sz="1400" b="1" i="0">
+              <a:rPr sz="1300" b="1" i="0">
+                <a:solidFill>
+                  <a:srgbClr val="1C7293"/>
+                </a:solidFill>
+                <a:latin typeface="Arial"/>
+              </a:rPr>
+              <a:t>Преимущества MPC:</a:t>
+            </a:r>
+          </a:p>
+          <a:p>
+            <a:pPr algn="l">
+              <a:lnSpc>
+                <a:spcPct val="130000"/>
+              </a:lnSpc>
+            </a:pPr>
+            <a:r>
+              <a:rPr sz="1300" b="0" i="0">
                 <a:solidFill>
                   <a:srgbClr val="21295C"/>
                 </a:solidFill>
                 <a:latin typeface="Arial"/>
               </a:rPr>
-              <a:t>MPC = Model Predictive Control</a:t>
+              <a:t>· Доказуемые гарантии устойчивости</a:t>
             </a:r>
           </a:p>
           <a:p>
@@ -18907,13 +18987,13 @@
               </a:lnSpc>
             </a:pPr>
             <a:r>
-              <a:rPr sz="1100" b="0" i="1">
+              <a:rPr sz="1200" b="0" i="1">
                 <a:solidFill>
                   <a:srgbClr val="065A82"/>
                 </a:solidFill>
                 <a:latin typeface="Arial"/>
               </a:rPr>
-              <a:t>модельное предиктивное управление</a:t>
+              <a:t>  (теория Ляпунова — теорема о функции энергии)</a:t>
             </a:r>
           </a:p>
           <a:p>
@@ -18923,12 +19003,60 @@
               </a:lnSpc>
             </a:pPr>
             <a:r>
-              <a:rPr sz="800" b="0" i="0">
+              <a:rPr sz="1300" b="0" i="0">
                 <a:solidFill>
                   <a:srgbClr val="21295C"/>
                 </a:solidFill>
                 <a:latin typeface="Arial"/>
               </a:rPr>
+              <a:t>· Явная оптимизация на горизонте N</a:t>
+            </a:r>
+          </a:p>
+          <a:p>
+            <a:pPr algn="l">
+              <a:lnSpc>
+                <a:spcPct val="130000"/>
+              </a:lnSpc>
+            </a:pPr>
+            <a:r>
+              <a:rPr sz="1300" b="0" i="0">
+                <a:solidFill>
+                  <a:srgbClr val="21295C"/>
+                </a:solidFill>
+                <a:latin typeface="Arial"/>
+              </a:rPr>
+              <a:t>· Учитывает жёсткие ограничения (PV/MV/выход)</a:t>
+            </a:r>
+          </a:p>
+          <a:p>
+            <a:pPr algn="l">
+              <a:lnSpc>
+                <a:spcPct val="130000"/>
+              </a:lnSpc>
+            </a:pPr>
+            <a:r>
+              <a:rPr sz="1300" b="0" i="0">
+                <a:solidFill>
+                  <a:srgbClr val="21295C"/>
+                </a:solidFill>
+                <a:latin typeface="Arial"/>
+              </a:rPr>
+              <a:t>· Сертифицируется в фарме и нефтехимии</a:t>
+            </a:r>
+          </a:p>
+          <a:p>
+            <a:pPr algn="l">
+              <a:lnSpc>
+                <a:spcPct val="130000"/>
+              </a:lnSpc>
+            </a:pPr>
+            <a:r>
+              <a:rPr sz="400" b="0" i="0">
+                <a:solidFill>
+                  <a:srgbClr val="21295C"/>
+                </a:solidFill>
+                <a:latin typeface="Arial"/>
+              </a:rPr>
               <a:t/>
             </a:r>
           </a:p>
@@ -18939,103 +19067,7 @@
               </a:lnSpc>
             </a:pPr>
             <a:r>
-              <a:rPr sz="1200" b="1" i="0">
-                <a:solidFill>
-                  <a:srgbClr val="1C7293"/>
-                </a:solidFill>
-                <a:latin typeface="Arial"/>
-              </a:rPr>
-              <a:t>Преимущества MPC:</a:t>
-            </a:r>
-          </a:p>
-          <a:p>
-            <a:pPr algn="l">
-              <a:lnSpc>
-                <a:spcPct val="130000"/>
-              </a:lnSpc>
-            </a:pPr>
-            <a:r>
-              <a:rPr sz="1200" b="0" i="0">
-                <a:solidFill>
-                  <a:srgbClr val="21295C"/>
-                </a:solidFill>
-                <a:latin typeface="Arial"/>
-              </a:rPr>
-              <a:t>· Доказуемые гарантии устойчивости (теория Ляпунова)</a:t>
-            </a:r>
-          </a:p>
-          <a:p>
-            <a:pPr algn="l">
-              <a:lnSpc>
-                <a:spcPct val="130000"/>
-              </a:lnSpc>
-            </a:pPr>
-            <a:r>
-              <a:rPr sz="1200" b="0" i="0">
-                <a:solidFill>
-                  <a:srgbClr val="21295C"/>
-                </a:solidFill>
-                <a:latin typeface="Arial"/>
-              </a:rPr>
-              <a:t>· Явная оптимизация на горизонте N</a:t>
-            </a:r>
-          </a:p>
-          <a:p>
-            <a:pPr algn="l">
-              <a:lnSpc>
-                <a:spcPct val="130000"/>
-              </a:lnSpc>
-            </a:pPr>
-            <a:r>
-              <a:rPr sz="1200" b="0" i="0">
-                <a:solidFill>
-                  <a:srgbClr val="21295C"/>
-                </a:solidFill>
-                <a:latin typeface="Arial"/>
-              </a:rPr>
-              <a:t>· Учитывает hard constraints (PV, MV, output)</a:t>
-            </a:r>
-          </a:p>
-          <a:p>
-            <a:pPr algn="l">
-              <a:lnSpc>
-                <a:spcPct val="130000"/>
-              </a:lnSpc>
-            </a:pPr>
-            <a:r>
-              <a:rPr sz="1200" b="0" i="0">
-                <a:solidFill>
-                  <a:srgbClr val="21295C"/>
-                </a:solidFill>
-                <a:latin typeface="Arial"/>
-              </a:rPr>
-              <a:t>· Сертифицируется в фарма и нефтехим</a:t>
-            </a:r>
-          </a:p>
-          <a:p>
-            <a:pPr algn="l">
-              <a:lnSpc>
-                <a:spcPct val="130000"/>
-              </a:lnSpc>
-            </a:pPr>
-            <a:r>
-              <a:rPr sz="600" b="0" i="0">
-                <a:solidFill>
-                  <a:srgbClr val="21295C"/>
-                </a:solidFill>
-                <a:latin typeface="Arial"/>
-              </a:rPr>
-              <a:t/>
-            </a:r>
-          </a:p>
-          <a:p>
-            <a:pPr algn="l">
-              <a:lnSpc>
-                <a:spcPct val="130000"/>
-              </a:lnSpc>
-            </a:pPr>
-            <a:r>
-              <a:rPr sz="1100" b="0" i="1">
+              <a:rPr sz="1200" b="1" i="1">
                 <a:solidFill>
                   <a:srgbClr val="F0AB00"/>
                 </a:solidFill>
@@ -19150,7 +19182,7 @@
                 </a:solidFill>
                 <a:latin typeface="Arial"/>
               </a:rPr>
-              <a:t>1. DT-2026</a:t>
+              <a:t>1. Двойник 2026</a:t>
             </a:r>
           </a:p>
         </p:txBody>
@@ -19857,7 +19889,7 @@
                 </a:solidFill>
                 <a:latin typeface="Arial"/>
               </a:rPr>
-              <a:t>Toyota Digit на RAV4 · BMW Leipzig humanoid pilot · единичные кейсы 2026</a:t>
+              <a:t>Toyota Digit на RAV4 · BMW Leipzig humanoid · единичные кейсы 2026</a:t>
             </a:r>
           </a:p>
           <a:p>
@@ -19889,7 +19921,7 @@
                 </a:solidFill>
                 <a:latin typeface="Arial"/>
               </a:rPr>
-              <a:t>Раздел 4.5 · 1 слайд · 2 минуты</a:t>
+              <a:t>Раздел 4.5 · верхняя ступень — единицы кейсов</a:t>
             </a:r>
           </a:p>
         </p:txBody>
@@ -20056,7 +20088,7 @@
                 </a:solidFill>
                 <a:latin typeface="Arial"/>
               </a:rPr>
-              <a:t>Humanoid robots in factory · Wikimedia · CC-BY-SA · аналог Agility Digit</a:t>
+              <a:t>Humanoid-роботы на фабрике · Wikimedia · CC-BY-SA · аналог Agility Digit</a:t>
             </a:r>
           </a:p>
         </p:txBody>
@@ -20265,7 +20297,7 @@
                 </a:solidFill>
                 <a:latin typeface="Arial"/>
               </a:rPr>
-              <a:t>Для критичный по безопасности действий требуется IEC 61508 SIL 2/3 или ATEX Zone 0. RL и humanoids не сертифицируются.</a:t>
+              <a:t>Для критичных по безопасности действий требуется IEC 61508 SIL 2/3 или ATEX Zone 0. RL и humanoid-роботы не сертифицируются.</a:t>
             </a:r>
           </a:p>
         </p:txBody>
@@ -20435,7 +20467,7 @@
                 </a:solidFill>
                 <a:latin typeface="Arial"/>
               </a:rPr>
-              <a:t>Humanoid Agility Robotics — несколько сотен тысяч долларов за единицу. Окупается только в нишах с высокой стоимостью труда + предсказуемой задачей.</a:t>
+              <a:t>Humanoid Agility Robotics — несколько сотен тысяч долларов за единицу. Окупается только в нишах с высокой стоимостью труда и предсказуемой задачей.</a:t>
             </a:r>
           </a:p>
         </p:txBody>
@@ -20605,7 +20637,7 @@
                 </a:solidFill>
                 <a:latin typeface="Arial"/>
               </a:rPr>
-              <a:t>A3 требует full-stack: twin + ИИ на границе сети + безопасная зона действия + управление флотом. Большинство заводов не имеет ни одного компонента промышленного класса.</a:t>
+              <a:t>A3 требует полный стек: двойник + ИИ на границе сети + безопасная зона действия + управление флотом. Большинство заводов не имеет ни одного компонента промышленного класса.</a:t>
             </a:r>
           </a:p>
         </p:txBody>
@@ -20692,7 +20724,7 @@
                 </a:solidFill>
                 <a:latin typeface="Arial"/>
               </a:rPr>
-              <a:t>Pattern 2026: A3-кейсы — логистические (Toyota Digit), не управляющие (никто не запустил RL автономно на химической колонне)</a:t>
+              <a:t>Паттерн 2026: A3-кейсы — логистические (Toyota Digit), не управляющие (никто не запустил RL автономно на химической колонне)</a:t>
             </a:r>
           </a:p>
         </p:txBody>
@@ -20801,7 +20833,7 @@
                 </a:solidFill>
                 <a:latin typeface="Arial"/>
               </a:rPr>
-              <a:t>1. DT-2026</a:t>
+              <a:t>1. Двойник 2026</a:t>
             </a:r>
           </a:p>
         </p:txBody>
@@ -21508,7 +21540,7 @@
                 </a:solidFill>
                 <a:latin typeface="Arial"/>
               </a:rPr>
-              <a:t>Десять критериев · фарма+FDA worked example · Gartner 40% cancellation · 5 вопросов</a:t>
+              <a:t>Десять критериев · фарма+FDA рабочий пример · Gartner 40% отмен · 5 вопросов вендору</a:t>
             </a:r>
           </a:p>
           <a:p>
@@ -21540,7 +21572,7 @@
                 </a:solidFill>
                 <a:latin typeface="Arial"/>
               </a:rPr>
-              <a:t>Раздел 5 · 5 слайдов · 15 минут — densest failure bucket</a:t>
+              <a:t>Раздел 5 · ядро лекции — критерии «AI не подходит»</a:t>
             </a:r>
           </a:p>
         </p:txBody>
@@ -21605,7 +21637,7 @@
                 </a:solidFill>
                 <a:latin typeface="Arial"/>
               </a:rPr>
-              <a:t>Где AI не нужен — начинаем с Southeast Asian Port</a:t>
+              <a:t>Где AI не нужен — начинаем с анонимного кейса морского порта 2024</a:t>
             </a:r>
           </a:p>
         </p:txBody>
@@ -21644,7 +21676,7 @@
                 </a:solidFill>
                 <a:latin typeface="Arial"/>
               </a:rPr>
-              <a:t>Канонический case Tesla 2018 разобран ранее; здесь — fresh 2024 failure, прямо связан с keystone двойником</a:t>
+              <a:t>Канонический случай Tesla 2018 разобран ранее; здесь — свежий провал 2024, прямо связан с keystone-двойником</a:t>
             </a:r>
           </a:p>
         </p:txBody>
@@ -21707,7 +21739,7 @@
                 </a:solidFill>
                 <a:latin typeface="Arial"/>
               </a:rPr>
-              <a:t>Container port Antwerp (MPET-MSC PSA) · Wikimedia · CC-BY-SA</a:t>
+              <a:t>Контейнерный порт Антверпен (MPET-MSC PSA) · Wikimedia · CC-BY-SA</a:t>
             </a:r>
           </a:p>
         </p:txBody>
@@ -21810,7 +21842,7 @@
                 </a:solidFill>
                 <a:latin typeface="Arial"/>
               </a:rPr>
-              <a:t>на digital twin</a:t>
+              <a:t>на цифровой двойник</a:t>
             </a:r>
           </a:p>
           <a:p>
@@ -21954,7 +21986,7 @@
                 </a:solidFill>
                 <a:latin typeface="Arial"/>
               </a:rPr>
-              <a:t>3D-визуализация без потока данных = музей, не twin.</a:t>
+              <a:t>3D-визуализация без потока данных = музей, а не двойник.</a:t>
             </a:r>
           </a:p>
         </p:txBody>
@@ -22180,7 +22212,7 @@
                 </a:solidFill>
                 <a:latin typeface="Arial"/>
               </a:rPr>
-              <a:t>Hardwired PLC + IEC 61508 SIL 2/3 + формальная верификация</a:t>
+              <a:t>Проводной PLC + IEC 61508 SIL 2/3 + формальная верификация</a:t>
             </a:r>
           </a:p>
         </p:txBody>
@@ -22380,7 +22412,7 @@
                 </a:solidFill>
                 <a:latin typeface="Arial"/>
               </a:rPr>
-              <a:t>Physics-based simulation + RCM</a:t>
+              <a:t>Физическая симуляция + RCM</a:t>
             </a:r>
           </a:p>
         </p:txBody>
@@ -22419,7 +22451,7 @@
                 </a:solidFill>
                 <a:latin typeface="Arial"/>
               </a:rPr>
-              <a:t>4. Defect detection нестабильного процесса</a:t>
+              <a:t>4. Поиск дефектов нестабильного процесса</a:t>
             </a:r>
           </a:p>
         </p:txBody>
@@ -22458,7 +22490,7 @@
                 </a:solidFill>
                 <a:latin typeface="Arial"/>
               </a:rPr>
-              <a:t>Process redesign ПЕРЕД vision AI</a:t>
+              <a:t>Пересмотр процесса ПЕРЕД применением Vision AI</a:t>
             </a:r>
           </a:p>
         </p:txBody>
@@ -22541,7 +22573,7 @@
                 </a:solidFill>
                 <a:latin typeface="Arial"/>
               </a:rPr>
-              <a:t>5. Tight tolerances ±0,001 мм</a:t>
+              <a:t>5. Жёсткие допуски ±0,001 мм</a:t>
             </a:r>
           </a:p>
         </p:txBody>
@@ -22580,7 +22612,7 @@
                 </a:solidFill>
                 <a:latin typeface="Arial"/>
               </a:rPr>
-              <a:t>Metrology + GD&amp;T + SPC</a:t>
+              <a:t>Метрология + GD&amp;T + SPC</a:t>
             </a:r>
           </a:p>
         </p:txBody>
@@ -22619,7 +22651,7 @@
                 </a:solidFill>
                 <a:latin typeface="Arial"/>
               </a:rPr>
-              <a:t>6. Generic PLC code generation</a:t>
+              <a:t>6. Универсальная генерация PLC-кода</a:t>
             </a:r>
           </a:p>
         </p:txBody>
@@ -22658,7 +22690,7 @@
                 </a:solidFill>
                 <a:latin typeface="Arial"/>
               </a:rPr>
-              <a:t>Purpose-built tool с инженер в петле ИЛИ инженер + симулятор</a:t>
+              <a:t>Специализированный инструмент с инженером в петле ИЛИ инженер + симулятор</a:t>
             </a:r>
           </a:p>
         </p:txBody>
@@ -22780,7 +22812,7 @@
                 </a:solidFill>
                 <a:latin typeface="Arial"/>
               </a:rPr>
-              <a:t>Explainable AI (SHAP / LIME) + правила + журнал аудита</a:t>
+              <a:t>Объяснимый ИИ (SHAP / LIME) + правила + журнал аудита</a:t>
             </a:r>
           </a:p>
         </p:txBody>
@@ -22941,7 +22973,7 @@
                 </a:solidFill>
                 <a:latin typeface="Arial"/>
               </a:rPr>
-              <a:t>9. Стоимость AI &gt; стоимость ошибки человека</a:t>
+              <a:t>9. Стоимость AI &gt; стоимости ошибки человека</a:t>
             </a:r>
           </a:p>
         </p:txBody>
@@ -23019,7 +23051,7 @@
                 </a:solidFill>
                 <a:latin typeface="Arial"/>
               </a:rPr>
-              <a:t>10. Отсутствие clear применение (data audit fails)</a:t>
+              <a:t>10. Отсутствие чёткого сценария (аудит данных не пройден)</a:t>
             </a:r>
           </a:p>
         </p:txBody>
@@ -23058,7 +23090,7 @@
                 </a:solidFill>
                 <a:latin typeface="Arial"/>
               </a:rPr>
-              <a:t>Аудит слоя данных (5 вопросов) + remediation ДО любого пилота</a:t>
+              <a:t>Аудит слоя данных (5 вопросов) + устранение замечаний ДО любого пилота</a:t>
             </a:r>
           </a:p>
         </p:txBody>
@@ -23210,7 +23242,7 @@
                 </a:solidFill>
                 <a:latin typeface="Arial"/>
               </a:rPr>
-              <a:t>Проработанный пример: фарма AI ±0,5% vs FDA-required ±0,1%</a:t>
+              <a:t>Проработанный пример: фарма-AI ±0,5% vs допуск FDA ±0,1%</a:t>
             </a:r>
           </a:p>
         </p:txBody>
@@ -23589,7 +23621,7 @@
                 </a:solidFill>
                 <a:latin typeface="Arial"/>
               </a:rPr>
-              <a:t>Учиться на исторических партиях, предсказывать дозировку «±0,5% от номинала», 90% accuracy на тесте</a:t>
+              <a:t>Учиться на исторических партиях, предсказывать дозировку «±0,5% от номинала», 90% точности на тесте</a:t>
             </a:r>
           </a:p>
         </p:txBody>
@@ -23759,7 +23791,7 @@
                 </a:solidFill>
                 <a:latin typeface="Arial"/>
               </a:rPr>
-              <a:t>±0,1% precision для batch решение о выпуске партии (FDA 21 CFR Part 11 + GAMP 5)</a:t>
+              <a:t>±0,1% точности для решения о выпуске партии (FDA 21 CFR Part 11 + GAMP 5)</a:t>
             </a:r>
           </a:p>
         </p:txBody>
@@ -23929,7 +23961,7 @@
                 </a:solidFill>
                 <a:latin typeface="Arial"/>
               </a:rPr>
-              <a:t>AI accuracy ±0,5% &lt; required tolerance ±0,1% — НЕСОВМЕСТИМО</a:t>
+              <a:t>Точность AI ±0,5% &lt; требуемого допуска ±0,1% — НЕСОВМЕСТИМО</a:t>
             </a:r>
           </a:p>
         </p:txBody>
@@ -24060,7 +24092,7 @@
                 </a:solidFill>
                 <a:latin typeface="Arial"/>
               </a:rPr>
-              <a:t>Verdict</a:t>
+              <a:t>Вердикт</a:t>
             </a:r>
           </a:p>
         </p:txBody>
@@ -24099,7 +24131,7 @@
                 </a:solidFill>
                 <a:latin typeface="Arial"/>
               </a:rPr>
-              <a:t>AI НЕ подходит для финального решение о выпуске партии</a:t>
+              <a:t>AI НЕ подходит для финального решения о выпуске партии</a:t>
             </a:r>
           </a:p>
         </p:txBody>
@@ -24186,7 +24218,7 @@
                 </a:solidFill>
                 <a:latin typeface="Arial"/>
               </a:rPr>
-              <a:t>АЛЬТЕРНАТИВА: AI как advisory tool на этапе process design (±0,5% полезна) + человек в петле QA + statistical batch sampling для release (validated USP / GMP)</a:t>
+              <a:t>АЛЬТЕРНАТИВА: AI как советующий инструмент на этапе разработки процесса (±0,5% полезна) + человек в петле контроля качества + статистическая выборка партий для выпуска (валидированная по USP / GMP)</a:t>
             </a:r>
           </a:p>
         </p:txBody>
@@ -24435,7 +24467,7 @@
         <p:spPr>
           <a:xfrm>
             <a:off x="594360" y="2651760"/>
-            <a:ext cx="1243584" cy="914400"/>
+            <a:ext cx="1243584" cy="1097280"/>
           </a:xfrm>
           <a:prstGeom prst="rect">
             <a:avLst/>
@@ -24474,8 +24506,8 @@
         </p:nvSpPr>
         <p:spPr>
           <a:xfrm>
-            <a:off x="594360" y="3749039"/>
-            <a:ext cx="1243584" cy="365760"/>
+            <a:off x="640080" y="4023360"/>
+            <a:ext cx="1152144" cy="2103120"/>
           </a:xfrm>
           <a:prstGeom prst="rect">
             <a:avLst/>
@@ -24490,63 +24522,24 @@
           <a:p>
             <a:pPr algn="ctr">
               <a:lnSpc>
-                <a:spcPct val="115000"/>
-              </a:lnSpc>
-            </a:pPr>
-            <a:r>
-              <a:rPr sz="1100" b="0" i="1">
-                <a:solidFill>
-                  <a:srgbClr val="F0AB00"/>
-                </a:solidFill>
-                <a:latin typeface="Arial"/>
-              </a:rPr>
-              <a:t>10м</a:t>
-            </a:r>
-          </a:p>
-        </p:txBody>
-      </p:sp>
-      <p:sp>
-        <p:nvSpPr>
-          <p:cNvPr id="9" name="TextBox 8"/>
-          <p:cNvSpPr txBox="1"/>
-          <p:nvPr/>
-        </p:nvSpPr>
-        <p:spPr>
-          <a:xfrm>
-            <a:off x="640080" y="4251960"/>
-            <a:ext cx="1152144" cy="1828800"/>
-          </a:xfrm>
-          <a:prstGeom prst="rect">
-            <a:avLst/>
-          </a:prstGeom>
-          <a:noFill/>
-        </p:spPr>
-        <p:txBody>
-          <a:bodyPr wrap="square" lIns="0" rIns="0" tIns="0" bIns="0" anchor="t">
-            <a:spAutoFit/>
-          </a:bodyPr>
-          <a:lstStyle/>
-          <a:p>
-            <a:pPr algn="ctr">
-              <a:lnSpc>
                 <a:spcPct val="130000"/>
               </a:lnSpc>
             </a:pPr>
             <a:r>
-              <a:rPr sz="900" b="0" i="0">
+              <a:rPr sz="1000" b="0" i="0">
                 <a:solidFill>
                   <a:srgbClr val="4A556B"/>
                 </a:solidFill>
                 <a:latin typeface="Arial"/>
               </a:rPr>
-              <a:t>Kritzinger + ГОСТ + рынок + 75% fail</a:t>
-            </a:r>
-          </a:p>
-        </p:txBody>
-      </p:sp>
-      <p:sp>
-        <p:nvSpPr>
-          <p:cNvPr id="10" name="Rounded Rectangle 9"/>
+              <a:t>Kritzinger + ГОСТ + рынок + 75% провал</a:t>
+            </a:r>
+          </a:p>
+        </p:txBody>
+      </p:sp>
+      <p:sp>
+        <p:nvSpPr>
+          <p:cNvPr id="9" name="Rounded Rectangle 8"/>
           <p:cNvSpPr/>
           <p:nvPr/>
         </p:nvSpPr>
@@ -24594,7 +24587,7 @@
       </p:sp>
       <p:sp>
         <p:nvSpPr>
-          <p:cNvPr id="11" name="Oval 10"/>
+          <p:cNvPr id="10" name="Oval 9"/>
           <p:cNvSpPr/>
           <p:nvPr/>
         </p:nvSpPr>
@@ -24638,7 +24631,7 @@
       </p:sp>
       <p:sp>
         <p:nvSpPr>
-          <p:cNvPr id="12" name="TextBox 11"/>
+          <p:cNvPr id="11" name="TextBox 10"/>
           <p:cNvSpPr txBox="1"/>
           <p:nvPr/>
         </p:nvSpPr>
@@ -24677,14 +24670,14 @@
       </p:sp>
       <p:sp>
         <p:nvSpPr>
-          <p:cNvPr id="13" name="TextBox 12"/>
+          <p:cNvPr id="12" name="TextBox 11"/>
           <p:cNvSpPr txBox="1"/>
           <p:nvPr/>
         </p:nvSpPr>
         <p:spPr>
           <a:xfrm>
             <a:off x="1965960" y="2651760"/>
-            <a:ext cx="1243584" cy="914400"/>
+            <a:ext cx="1243584" cy="1097280"/>
           </a:xfrm>
           <a:prstGeom prst="rect">
             <a:avLst/>
@@ -24716,14 +24709,14 @@
       </p:sp>
       <p:sp>
         <p:nvSpPr>
-          <p:cNvPr id="14" name="TextBox 13"/>
+          <p:cNvPr id="13" name="TextBox 12"/>
           <p:cNvSpPr txBox="1"/>
           <p:nvPr/>
         </p:nvSpPr>
         <p:spPr>
           <a:xfrm>
-            <a:off x="1965960" y="3749039"/>
-            <a:ext cx="1243584" cy="365760"/>
+            <a:off x="2011680" y="4023360"/>
+            <a:ext cx="1152144" cy="2103120"/>
           </a:xfrm>
           <a:prstGeom prst="rect">
             <a:avLst/>
@@ -24738,63 +24731,24 @@
           <a:p>
             <a:pPr algn="ctr">
               <a:lnSpc>
-                <a:spcPct val="115000"/>
-              </a:lnSpc>
-            </a:pPr>
-            <a:r>
-              <a:rPr sz="1100" b="0" i="1">
-                <a:solidFill>
-                  <a:srgbClr val="F0AB00"/>
-                </a:solidFill>
-                <a:latin typeface="Arial"/>
-              </a:rPr>
-              <a:t>10м</a:t>
-            </a:r>
-          </a:p>
-        </p:txBody>
-      </p:sp>
-      <p:sp>
-        <p:nvSpPr>
-          <p:cNvPr id="15" name="TextBox 14"/>
-          <p:cNvSpPr txBox="1"/>
-          <p:nvPr/>
-        </p:nvSpPr>
-        <p:spPr>
-          <a:xfrm>
-            <a:off x="2011680" y="4251960"/>
-            <a:ext cx="1152144" cy="1828800"/>
-          </a:xfrm>
-          <a:prstGeom prst="rect">
-            <a:avLst/>
-          </a:prstGeom>
-          <a:noFill/>
-        </p:spPr>
-        <p:txBody>
-          <a:bodyPr wrap="square" lIns="0" rIns="0" tIns="0" bIns="0" anchor="t">
-            <a:spAutoFit/>
-          </a:bodyPr>
-          <a:lstStyle/>
-          <a:p>
-            <a:pPr algn="ctr">
-              <a:lnSpc>
                 <a:spcPct val="130000"/>
               </a:lnSpc>
             </a:pPr>
             <a:r>
-              <a:rPr sz="900" b="0" i="0">
+              <a:rPr sz="1000" b="0" i="0">
                 <a:solidFill>
                   <a:srgbClr val="4A556B"/>
                 </a:solidFill>
                 <a:latin typeface="Arial"/>
               </a:rPr>
-              <a:t>Vision QC + PdM + границы</a:t>
-            </a:r>
-          </a:p>
-        </p:txBody>
-      </p:sp>
-      <p:sp>
-        <p:nvSpPr>
-          <p:cNvPr id="16" name="Rounded Rectangle 15"/>
+              <a:t>Vision QC + прогност. обслуж. + границы</a:t>
+            </a:r>
+          </a:p>
+        </p:txBody>
+      </p:sp>
+      <p:sp>
+        <p:nvSpPr>
+          <p:cNvPr id="14" name="Rounded Rectangle 13"/>
           <p:cNvSpPr/>
           <p:nvPr/>
         </p:nvSpPr>
@@ -24842,7 +24796,7 @@
       </p:sp>
       <p:sp>
         <p:nvSpPr>
-          <p:cNvPr id="17" name="Oval 16"/>
+          <p:cNvPr id="15" name="Oval 14"/>
           <p:cNvSpPr/>
           <p:nvPr/>
         </p:nvSpPr>
@@ -24886,7 +24840,7 @@
       </p:sp>
       <p:sp>
         <p:nvSpPr>
-          <p:cNvPr id="18" name="TextBox 17"/>
+          <p:cNvPr id="16" name="TextBox 15"/>
           <p:cNvSpPr txBox="1"/>
           <p:nvPr/>
         </p:nvSpPr>
@@ -24925,14 +24879,14 @@
       </p:sp>
       <p:sp>
         <p:nvSpPr>
-          <p:cNvPr id="19" name="TextBox 18"/>
+          <p:cNvPr id="17" name="TextBox 16"/>
           <p:cNvSpPr txBox="1"/>
           <p:nvPr/>
         </p:nvSpPr>
         <p:spPr>
           <a:xfrm>
             <a:off x="3337560" y="2651760"/>
-            <a:ext cx="1243584" cy="914400"/>
+            <a:ext cx="1243584" cy="1097280"/>
           </a:xfrm>
           <a:prstGeom prst="rect">
             <a:avLst/>
@@ -24964,14 +24918,14 @@
       </p:sp>
       <p:sp>
         <p:nvSpPr>
-          <p:cNvPr id="20" name="TextBox 19"/>
+          <p:cNvPr id="18" name="TextBox 17"/>
           <p:cNvSpPr txBox="1"/>
           <p:nvPr/>
         </p:nvSpPr>
         <p:spPr>
           <a:xfrm>
-            <a:off x="3337560" y="3749039"/>
-            <a:ext cx="1243584" cy="365760"/>
+            <a:off x="3383280" y="4023360"/>
+            <a:ext cx="1152144" cy="2103120"/>
           </a:xfrm>
           <a:prstGeom prst="rect">
             <a:avLst/>
@@ -24986,63 +24940,24 @@
           <a:p>
             <a:pPr algn="ctr">
               <a:lnSpc>
-                <a:spcPct val="115000"/>
-              </a:lnSpc>
-            </a:pPr>
-            <a:r>
-              <a:rPr sz="1100" b="0" i="1">
-                <a:solidFill>
-                  <a:srgbClr val="F0AB00"/>
-                </a:solidFill>
-                <a:latin typeface="Arial"/>
-              </a:rPr>
-              <a:t>10м</a:t>
-            </a:r>
-          </a:p>
-        </p:txBody>
-      </p:sp>
-      <p:sp>
-        <p:nvSpPr>
-          <p:cNvPr id="21" name="TextBox 20"/>
-          <p:cNvSpPr txBox="1"/>
-          <p:nvPr/>
-        </p:nvSpPr>
-        <p:spPr>
-          <a:xfrm>
-            <a:off x="3383280" y="4251960"/>
-            <a:ext cx="1152144" cy="1828800"/>
-          </a:xfrm>
-          <a:prstGeom prst="rect">
-            <a:avLst/>
-          </a:prstGeom>
-          <a:noFill/>
-        </p:spPr>
-        <p:txBody>
-          <a:bodyPr wrap="square" lIns="0" rIns="0" tIns="0" bIns="0" anchor="t">
-            <a:spAutoFit/>
-          </a:bodyPr>
-          <a:lstStyle/>
-          <a:p>
-            <a:pPr algn="ctr">
-              <a:lnSpc>
                 <a:spcPct val="130000"/>
               </a:lnSpc>
             </a:pPr>
             <a:r>
-              <a:rPr sz="900" b="0" i="0">
+              <a:rPr sz="1000" b="0" i="0">
                 <a:solidFill>
                   <a:srgbClr val="4A556B"/>
                 </a:solidFill>
                 <a:latin typeface="Arial"/>
               </a:rPr>
-              <a:t>MES + alarm + PLC Copilot</a:t>
-            </a:r>
-          </a:p>
-        </p:txBody>
-      </p:sp>
-      <p:sp>
-        <p:nvSpPr>
-          <p:cNvPr id="22" name="Rounded Rectangle 21"/>
+              <a:t>MES + предсказ. тревог + PLC Copilot</a:t>
+            </a:r>
+          </a:p>
+        </p:txBody>
+      </p:sp>
+      <p:sp>
+        <p:nvSpPr>
+          <p:cNvPr id="19" name="Rounded Rectangle 18"/>
           <p:cNvSpPr/>
           <p:nvPr/>
         </p:nvSpPr>
@@ -25090,7 +25005,7 @@
       </p:sp>
       <p:sp>
         <p:nvSpPr>
-          <p:cNvPr id="23" name="Oval 22"/>
+          <p:cNvPr id="20" name="Oval 19"/>
           <p:cNvSpPr/>
           <p:nvPr/>
         </p:nvSpPr>
@@ -25134,7 +25049,7 @@
       </p:sp>
       <p:sp>
         <p:nvSpPr>
-          <p:cNvPr id="24" name="TextBox 23"/>
+          <p:cNvPr id="21" name="TextBox 20"/>
           <p:cNvSpPr txBox="1"/>
           <p:nvPr/>
         </p:nvSpPr>
@@ -25173,14 +25088,14 @@
       </p:sp>
       <p:sp>
         <p:nvSpPr>
-          <p:cNvPr id="25" name="TextBox 24"/>
+          <p:cNvPr id="22" name="TextBox 21"/>
           <p:cNvSpPr txBox="1"/>
           <p:nvPr/>
         </p:nvSpPr>
         <p:spPr>
           <a:xfrm>
             <a:off x="4709159" y="2651760"/>
-            <a:ext cx="1243584" cy="914400"/>
+            <a:ext cx="1243584" cy="1097280"/>
           </a:xfrm>
           <a:prstGeom prst="rect">
             <a:avLst/>
@@ -25212,14 +25127,14 @@
       </p:sp>
       <p:sp>
         <p:nvSpPr>
-          <p:cNvPr id="26" name="TextBox 25"/>
+          <p:cNvPr id="23" name="TextBox 22"/>
           <p:cNvSpPr txBox="1"/>
           <p:nvPr/>
         </p:nvSpPr>
         <p:spPr>
           <a:xfrm>
-            <a:off x="4709159" y="3749039"/>
-            <a:ext cx="1243584" cy="365760"/>
+            <a:off x="4754879" y="4023360"/>
+            <a:ext cx="1152144" cy="2103120"/>
           </a:xfrm>
           <a:prstGeom prst="rect">
             <a:avLst/>
@@ -25234,63 +25149,24 @@
           <a:p>
             <a:pPr algn="ctr">
               <a:lnSpc>
-                <a:spcPct val="115000"/>
-              </a:lnSpc>
-            </a:pPr>
-            <a:r>
-              <a:rPr sz="1100" b="0" i="1">
-                <a:solidFill>
-                  <a:srgbClr val="F0AB00"/>
-                </a:solidFill>
-                <a:latin typeface="Arial"/>
-              </a:rPr>
-              <a:t>10м</a:t>
-            </a:r>
-          </a:p>
-        </p:txBody>
-      </p:sp>
-      <p:sp>
-        <p:nvSpPr>
-          <p:cNvPr id="27" name="TextBox 26"/>
-          <p:cNvSpPr txBox="1"/>
-          <p:nvPr/>
-        </p:nvSpPr>
-        <p:spPr>
-          <a:xfrm>
-            <a:off x="4754879" y="4251960"/>
-            <a:ext cx="1152144" cy="1828800"/>
-          </a:xfrm>
-          <a:prstGeom prst="rect">
-            <a:avLst/>
-          </a:prstGeom>
-          <a:noFill/>
-        </p:spPr>
-        <p:txBody>
-          <a:bodyPr wrap="square" lIns="0" rIns="0" tIns="0" bIns="0" anchor="t">
-            <a:spAutoFit/>
-          </a:bodyPr>
-          <a:lstStyle/>
-          <a:p>
-            <a:pPr algn="ctr">
-              <a:lnSpc>
                 <a:spcPct val="130000"/>
               </a:lnSpc>
             </a:pPr>
             <a:r>
-              <a:rPr sz="900" b="0" i="0">
+              <a:rPr sz="1000" b="0" i="0">
                 <a:solidFill>
                   <a:srgbClr val="4A556B"/>
                 </a:solidFill>
                 <a:latin typeface="Arial"/>
               </a:rPr>
-              <a:t>Yokogawa + twin как песочница</a:t>
-            </a:r>
-          </a:p>
-        </p:txBody>
-      </p:sp>
-      <p:sp>
-        <p:nvSpPr>
-          <p:cNvPr id="28" name="Rounded Rectangle 27"/>
+              <a:t>Yokogawa + двойник как песочница</a:t>
+            </a:r>
+          </a:p>
+        </p:txBody>
+      </p:sp>
+      <p:sp>
+        <p:nvSpPr>
+          <p:cNvPr id="24" name="Rounded Rectangle 23"/>
           <p:cNvSpPr/>
           <p:nvPr/>
         </p:nvSpPr>
@@ -25338,7 +25214,7 @@
       </p:sp>
       <p:sp>
         <p:nvSpPr>
-          <p:cNvPr id="29" name="Oval 28"/>
+          <p:cNvPr id="25" name="Oval 24"/>
           <p:cNvSpPr/>
           <p:nvPr/>
         </p:nvSpPr>
@@ -25382,7 +25258,7 @@
       </p:sp>
       <p:sp>
         <p:nvSpPr>
-          <p:cNvPr id="30" name="TextBox 29"/>
+          <p:cNvPr id="26" name="TextBox 25"/>
           <p:cNvSpPr txBox="1"/>
           <p:nvPr/>
         </p:nvSpPr>
@@ -25421,14 +25297,14 @@
       </p:sp>
       <p:sp>
         <p:nvSpPr>
-          <p:cNvPr id="31" name="TextBox 30"/>
+          <p:cNvPr id="27" name="TextBox 26"/>
           <p:cNvSpPr txBox="1"/>
           <p:nvPr/>
         </p:nvSpPr>
         <p:spPr>
           <a:xfrm>
             <a:off x="6080759" y="2651760"/>
-            <a:ext cx="1243584" cy="914400"/>
+            <a:ext cx="1243584" cy="1097280"/>
           </a:xfrm>
           <a:prstGeom prst="rect">
             <a:avLst/>
@@ -25460,14 +25336,14 @@
       </p:sp>
       <p:sp>
         <p:nvSpPr>
-          <p:cNvPr id="32" name="TextBox 31"/>
+          <p:cNvPr id="28" name="TextBox 27"/>
           <p:cNvSpPr txBox="1"/>
           <p:nvPr/>
         </p:nvSpPr>
         <p:spPr>
           <a:xfrm>
-            <a:off x="6080759" y="3749039"/>
-            <a:ext cx="1243584" cy="365760"/>
+            <a:off x="6126479" y="4023360"/>
+            <a:ext cx="1152144" cy="2103120"/>
           </a:xfrm>
           <a:prstGeom prst="rect">
             <a:avLst/>
@@ -25482,50 +25358,11 @@
           <a:p>
             <a:pPr algn="ctr">
               <a:lnSpc>
-                <a:spcPct val="115000"/>
-              </a:lnSpc>
-            </a:pPr>
-            <a:r>
-              <a:rPr sz="1100" b="0" i="1">
-                <a:solidFill>
-                  <a:srgbClr val="F0AB00"/>
-                </a:solidFill>
-                <a:latin typeface="Arial"/>
-              </a:rPr>
-              <a:t>2м</a:t>
-            </a:r>
-          </a:p>
-        </p:txBody>
-      </p:sp>
-      <p:sp>
-        <p:nvSpPr>
-          <p:cNvPr id="33" name="TextBox 32"/>
-          <p:cNvSpPr txBox="1"/>
-          <p:nvPr/>
-        </p:nvSpPr>
-        <p:spPr>
-          <a:xfrm>
-            <a:off x="6126479" y="4251960"/>
-            <a:ext cx="1152144" cy="1828800"/>
-          </a:xfrm>
-          <a:prstGeom prst="rect">
-            <a:avLst/>
-          </a:prstGeom>
-          <a:noFill/>
-        </p:spPr>
-        <p:txBody>
-          <a:bodyPr wrap="square" lIns="0" rIns="0" tIns="0" bIns="0" anchor="t">
-            <a:spAutoFit/>
-          </a:bodyPr>
-          <a:lstStyle/>
-          <a:p>
-            <a:pPr algn="ctr">
-              <a:lnSpc>
                 <a:spcPct val="130000"/>
               </a:lnSpc>
             </a:pPr>
             <a:r>
-              <a:rPr sz="900" b="0" i="0">
+              <a:rPr sz="1000" b="0" i="0">
                 <a:solidFill>
                   <a:srgbClr val="4A556B"/>
                 </a:solidFill>
@@ -25538,7 +25375,7 @@
       </p:sp>
       <p:sp>
         <p:nvSpPr>
-          <p:cNvPr id="34" name="Rounded Rectangle 33"/>
+          <p:cNvPr id="29" name="Rounded Rectangle 28"/>
           <p:cNvSpPr/>
           <p:nvPr/>
         </p:nvSpPr>
@@ -25586,7 +25423,7 @@
       </p:sp>
       <p:sp>
         <p:nvSpPr>
-          <p:cNvPr id="35" name="Oval 34"/>
+          <p:cNvPr id="30" name="Oval 29"/>
           <p:cNvSpPr/>
           <p:nvPr/>
         </p:nvSpPr>
@@ -25630,7 +25467,7 @@
       </p:sp>
       <p:sp>
         <p:nvSpPr>
-          <p:cNvPr id="36" name="TextBox 35"/>
+          <p:cNvPr id="31" name="TextBox 30"/>
           <p:cNvSpPr txBox="1"/>
           <p:nvPr/>
         </p:nvSpPr>
@@ -25669,14 +25506,14 @@
       </p:sp>
       <p:sp>
         <p:nvSpPr>
-          <p:cNvPr id="37" name="TextBox 36"/>
+          <p:cNvPr id="32" name="TextBox 31"/>
           <p:cNvSpPr txBox="1"/>
           <p:nvPr/>
         </p:nvSpPr>
         <p:spPr>
           <a:xfrm>
             <a:off x="7452360" y="2651760"/>
-            <a:ext cx="1243584" cy="914400"/>
+            <a:ext cx="1243584" cy="1097280"/>
           </a:xfrm>
           <a:prstGeom prst="rect">
             <a:avLst/>
@@ -25708,14 +25545,14 @@
       </p:sp>
       <p:sp>
         <p:nvSpPr>
-          <p:cNvPr id="38" name="TextBox 37"/>
+          <p:cNvPr id="33" name="TextBox 32"/>
           <p:cNvSpPr txBox="1"/>
           <p:nvPr/>
         </p:nvSpPr>
         <p:spPr>
           <a:xfrm>
-            <a:off x="7452360" y="3749039"/>
-            <a:ext cx="1243584" cy="365760"/>
+            <a:off x="7498079" y="4023360"/>
+            <a:ext cx="1152144" cy="2103120"/>
           </a:xfrm>
           <a:prstGeom prst="rect">
             <a:avLst/>
@@ -25730,50 +25567,11 @@
           <a:p>
             <a:pPr algn="ctr">
               <a:lnSpc>
-                <a:spcPct val="115000"/>
-              </a:lnSpc>
-            </a:pPr>
-            <a:r>
-              <a:rPr sz="1100" b="0" i="1">
-                <a:solidFill>
-                  <a:srgbClr val="F0AB00"/>
-                </a:solidFill>
-                <a:latin typeface="Arial"/>
-              </a:rPr>
-              <a:t>15м</a:t>
-            </a:r>
-          </a:p>
-        </p:txBody>
-      </p:sp>
-      <p:sp>
-        <p:nvSpPr>
-          <p:cNvPr id="39" name="TextBox 38"/>
-          <p:cNvSpPr txBox="1"/>
-          <p:nvPr/>
-        </p:nvSpPr>
-        <p:spPr>
-          <a:xfrm>
-            <a:off x="7498079" y="4251960"/>
-            <a:ext cx="1152144" cy="1828800"/>
-          </a:xfrm>
-          <a:prstGeom prst="rect">
-            <a:avLst/>
-          </a:prstGeom>
-          <a:noFill/>
-        </p:spPr>
-        <p:txBody>
-          <a:bodyPr wrap="square" lIns="0" rIns="0" tIns="0" bIns="0" anchor="t">
-            <a:spAutoFit/>
-          </a:bodyPr>
-          <a:lstStyle/>
-          <a:p>
-            <a:pPr algn="ctr">
-              <a:lnSpc>
                 <a:spcPct val="130000"/>
               </a:lnSpc>
             </a:pPr>
             <a:r>
-              <a:rPr sz="900" b="0" i="0">
+              <a:rPr sz="1000" b="0" i="0">
                 <a:solidFill>
                   <a:srgbClr val="4A556B"/>
                 </a:solidFill>
@@ -25786,7 +25584,7 @@
       </p:sp>
       <p:sp>
         <p:nvSpPr>
-          <p:cNvPr id="40" name="Rounded Rectangle 39"/>
+          <p:cNvPr id="34" name="Rounded Rectangle 33"/>
           <p:cNvSpPr/>
           <p:nvPr/>
         </p:nvSpPr>
@@ -25834,7 +25632,7 @@
       </p:sp>
       <p:sp>
         <p:nvSpPr>
-          <p:cNvPr id="41" name="Oval 40"/>
+          <p:cNvPr id="35" name="Oval 34"/>
           <p:cNvSpPr/>
           <p:nvPr/>
         </p:nvSpPr>
@@ -25878,7 +25676,7 @@
       </p:sp>
       <p:sp>
         <p:nvSpPr>
-          <p:cNvPr id="42" name="TextBox 41"/>
+          <p:cNvPr id="36" name="TextBox 35"/>
           <p:cNvSpPr txBox="1"/>
           <p:nvPr/>
         </p:nvSpPr>
@@ -25917,14 +25715,14 @@
       </p:sp>
       <p:sp>
         <p:nvSpPr>
-          <p:cNvPr id="43" name="TextBox 42"/>
+          <p:cNvPr id="37" name="TextBox 36"/>
           <p:cNvSpPr txBox="1"/>
           <p:nvPr/>
         </p:nvSpPr>
         <p:spPr>
           <a:xfrm>
             <a:off x="8823960" y="2651760"/>
-            <a:ext cx="1243584" cy="914400"/>
+            <a:ext cx="1243584" cy="1097280"/>
           </a:xfrm>
           <a:prstGeom prst="rect">
             <a:avLst/>
@@ -25956,14 +25754,14 @@
       </p:sp>
       <p:sp>
         <p:nvSpPr>
-          <p:cNvPr id="44" name="TextBox 43"/>
+          <p:cNvPr id="38" name="TextBox 37"/>
           <p:cNvSpPr txBox="1"/>
           <p:nvPr/>
         </p:nvSpPr>
         <p:spPr>
           <a:xfrm>
-            <a:off x="8823960" y="3749039"/>
-            <a:ext cx="1243584" cy="365760"/>
+            <a:off x="8869680" y="4023360"/>
+            <a:ext cx="1152144" cy="2103120"/>
           </a:xfrm>
           <a:prstGeom prst="rect">
             <a:avLst/>
@@ -25978,50 +25776,11 @@
           <a:p>
             <a:pPr algn="ctr">
               <a:lnSpc>
-                <a:spcPct val="115000"/>
-              </a:lnSpc>
-            </a:pPr>
-            <a:r>
-              <a:rPr sz="1100" b="0" i="1">
-                <a:solidFill>
-                  <a:srgbClr val="F0AB00"/>
-                </a:solidFill>
-                <a:latin typeface="Arial"/>
-              </a:rPr>
-              <a:t>6м</a:t>
-            </a:r>
-          </a:p>
-        </p:txBody>
-      </p:sp>
-      <p:sp>
-        <p:nvSpPr>
-          <p:cNvPr id="45" name="TextBox 44"/>
-          <p:cNvSpPr txBox="1"/>
-          <p:nvPr/>
-        </p:nvSpPr>
-        <p:spPr>
-          <a:xfrm>
-            <a:off x="8869680" y="4251960"/>
-            <a:ext cx="1152144" cy="1828800"/>
-          </a:xfrm>
-          <a:prstGeom prst="rect">
-            <a:avLst/>
-          </a:prstGeom>
-          <a:noFill/>
-        </p:spPr>
-        <p:txBody>
-          <a:bodyPr wrap="square" lIns="0" rIns="0" tIns="0" bIns="0" anchor="t">
-            <a:spAutoFit/>
-          </a:bodyPr>
-          <a:lstStyle/>
-          <a:p>
-            <a:pPr algn="ctr">
-              <a:lnSpc>
                 <a:spcPct val="130000"/>
               </a:lnSpc>
             </a:pPr>
             <a:r>
-              <a:rPr sz="900" b="0" i="0">
+              <a:rPr sz="1000" b="0" i="0">
                 <a:solidFill>
                   <a:srgbClr val="4A556B"/>
                 </a:solidFill>
@@ -26034,7 +25793,7 @@
       </p:sp>
       <p:sp>
         <p:nvSpPr>
-          <p:cNvPr id="46" name="Rounded Rectangle 45"/>
+          <p:cNvPr id="39" name="Rounded Rectangle 38"/>
           <p:cNvSpPr/>
           <p:nvPr/>
         </p:nvSpPr>
@@ -26082,7 +25841,7 @@
       </p:sp>
       <p:sp>
         <p:nvSpPr>
-          <p:cNvPr id="47" name="Oval 46"/>
+          <p:cNvPr id="40" name="Oval 39"/>
           <p:cNvSpPr/>
           <p:nvPr/>
         </p:nvSpPr>
@@ -26126,7 +25885,7 @@
       </p:sp>
       <p:sp>
         <p:nvSpPr>
-          <p:cNvPr id="48" name="TextBox 47"/>
+          <p:cNvPr id="41" name="TextBox 40"/>
           <p:cNvSpPr txBox="1"/>
           <p:nvPr/>
         </p:nvSpPr>
@@ -26165,14 +25924,14 @@
       </p:sp>
       <p:sp>
         <p:nvSpPr>
-          <p:cNvPr id="49" name="TextBox 48"/>
+          <p:cNvPr id="42" name="TextBox 41"/>
           <p:cNvSpPr txBox="1"/>
           <p:nvPr/>
         </p:nvSpPr>
         <p:spPr>
           <a:xfrm>
             <a:off x="10195560" y="2651760"/>
-            <a:ext cx="1243584" cy="914400"/>
+            <a:ext cx="1243584" cy="1097280"/>
           </a:xfrm>
           <a:prstGeom prst="rect">
             <a:avLst/>
@@ -26205,14 +25964,14 @@
       </p:sp>
       <p:sp>
         <p:nvSpPr>
-          <p:cNvPr id="50" name="TextBox 49"/>
+          <p:cNvPr id="43" name="TextBox 42"/>
           <p:cNvSpPr txBox="1"/>
           <p:nvPr/>
         </p:nvSpPr>
         <p:spPr>
           <a:xfrm>
-            <a:off x="10195560" y="3749039"/>
-            <a:ext cx="1243584" cy="365760"/>
+            <a:off x="10241280" y="4023360"/>
+            <a:ext cx="1152144" cy="2103120"/>
           </a:xfrm>
           <a:prstGeom prst="rect">
             <a:avLst/>
@@ -26227,50 +25986,11 @@
           <a:p>
             <a:pPr algn="ctr">
               <a:lnSpc>
-                <a:spcPct val="115000"/>
-              </a:lnSpc>
-            </a:pPr>
-            <a:r>
-              <a:rPr sz="1100" b="0" i="1">
-                <a:solidFill>
-                  <a:srgbClr val="F0AB00"/>
-                </a:solidFill>
-                <a:latin typeface="Arial"/>
-              </a:rPr>
-              <a:t>7м</a:t>
-            </a:r>
-          </a:p>
-        </p:txBody>
-      </p:sp>
-      <p:sp>
-        <p:nvSpPr>
-          <p:cNvPr id="51" name="TextBox 50"/>
-          <p:cNvSpPr txBox="1"/>
-          <p:nvPr/>
-        </p:nvSpPr>
-        <p:spPr>
-          <a:xfrm>
-            <a:off x="10241280" y="4251960"/>
-            <a:ext cx="1152144" cy="1828800"/>
-          </a:xfrm>
-          <a:prstGeom prst="rect">
-            <a:avLst/>
-          </a:prstGeom>
-          <a:noFill/>
-        </p:spPr>
-        <p:txBody>
-          <a:bodyPr wrap="square" lIns="0" rIns="0" tIns="0" bIns="0" anchor="t">
-            <a:spAutoFit/>
-          </a:bodyPr>
-          <a:lstStyle/>
-          <a:p>
-            <a:pPr algn="ctr">
-              <a:lnSpc>
                 <a:spcPct val="130000"/>
               </a:lnSpc>
             </a:pPr>
             <a:r>
-              <a:rPr sz="900" b="0" i="0">
+              <a:rPr sz="1000" b="0" i="0">
                 <a:solidFill>
                   <a:srgbClr val="4A556B"/>
                 </a:solidFill>
@@ -26283,7 +26003,7 @@
       </p:sp>
       <p:sp>
         <p:nvSpPr>
-          <p:cNvPr id="52" name="TextBox 51"/>
+          <p:cNvPr id="44" name="TextBox 43"/>
           <p:cNvSpPr txBox="1"/>
           <p:nvPr/>
         </p:nvSpPr>
@@ -26419,7 +26139,7 @@
                 </a:solidFill>
                 <a:latin typeface="Arial"/>
               </a:rPr>
-              <a:t>+ 30% GenAI PoC прекращены после пилота · 75% twins без ROI · 11% / 14% expectation gap</a:t>
+              <a:t>+ 30% пилотов генеративного ИИ прекращены после фазы PoC · 75% двойников без окупаемости · разрыв ожиданий 11% / 14%</a:t>
             </a:r>
           </a:p>
         </p:txBody>
@@ -26610,7 +26330,7 @@
                 </a:solidFill>
                 <a:latin typeface="Arial"/>
               </a:rPr>
-              <a:t>Студент 3 курса увидит pitch «agentic AI for manufacturing» в первый год работы.</a:t>
+              <a:t>Студент 3 курса увидит презентацию «агентный AI для производства» в первый год работы.</a:t>
             </a:r>
           </a:p>
           <a:p>
@@ -26642,7 +26362,7 @@
                 </a:solidFill>
                 <a:latin typeface="Arial"/>
               </a:rPr>
-              <a:t>Это не означает что AI не работает.</a:t>
+              <a:t>Это не означает, что AI не работает.</a:t>
             </a:r>
           </a:p>
           <a:p>
@@ -26674,7 +26394,7 @@
                 </a:solidFill>
                 <a:latin typeface="Arial"/>
               </a:rPr>
-              <a:t>Это означает что распространение опережает инфраструктурную готовность.</a:t>
+              <a:t>Это означает, что распространение опережает инфраструктурную готовность.</a:t>
             </a:r>
           </a:p>
           <a:p>
@@ -26761,7 +26481,7 @@
                 </a:solidFill>
                 <a:latin typeface="Arial"/>
               </a:rPr>
-              <a:t>Gartner via XMPRO 2026 · EY / DataMintelligence 2026 · context-clue.com 2026</a:t>
+              <a:t>Gartner via XMPRO 2026 · EY / DataMintelligence 2026 · Build in Digital [41] 2024–2025</a:t>
             </a:r>
           </a:p>
         </p:txBody>
@@ -27035,7 +26755,7 @@
                 </a:solidFill>
                 <a:latin typeface="Arial"/>
               </a:rPr>
-              <a:t>Покажите 3 задокументированные провалы за последние 24 месяца в той же индустрии</a:t>
+              <a:t>Покажите 3 задокументированных провала за последние 24 месяца в той же индустрии</a:t>
             </a:r>
           </a:p>
         </p:txBody>
@@ -27074,7 +26794,7 @@
                 </a:solidFill>
                 <a:latin typeface="Arial"/>
               </a:rPr>
-              <a:t>Без failure-кейсов вендор продаёт hype</a:t>
+              <a:t>Без кейсов с провалами вендор продаёт завышенные ожидания</a:t>
             </a:r>
           </a:p>
         </p:txBody>
@@ -27492,7 +27212,7 @@
                 </a:solidFill>
                 <a:latin typeface="Arial"/>
               </a:rPr>
-              <a:t>Без аудита — Southeast Asian Port lesson повторится</a:t>
+              <a:t>Без аудита — урок «анонимного порта» повторится</a:t>
             </a:r>
           </a:p>
         </p:txBody>
@@ -27662,7 +27382,7 @@
                 </a:solidFill>
                 <a:latin typeface="Arial"/>
               </a:rPr>
-              <a:t>Какова ваша альтернатива, если pilot fails — refund, pivot, continued integration?</a:t>
+              <a:t>Что вы предлагаете, если пилот провалится — возврат денег, изменение задачи, продолжение интеграции?</a:t>
             </a:r>
           </a:p>
         </p:txBody>
@@ -27701,7 +27421,7 @@
                 </a:solidFill>
                 <a:latin typeface="Arial"/>
               </a:rPr>
-              <a:t>Контракт без exit-стратегии — деньги в одну сторону</a:t>
+              <a:t>Контракт без стратегии выхода — деньги в одну сторону</a:t>
             </a:r>
           </a:p>
         </p:txBody>
@@ -27871,7 +27591,7 @@
                 </a:solidFill>
                 <a:latin typeface="Arial"/>
               </a:rPr>
-              <a:t>Можете показать референс-клиент в нашем sub-сегменте (process / discrete / regulated)?</a:t>
+              <a:t>Можете показать референс-клиента в нашем подсегменте (process / discrete / regulated)?</a:t>
             </a:r>
           </a:p>
         </p:txBody>
@@ -27910,7 +27630,7 @@
                 </a:solidFill>
                 <a:latin typeface="Arial"/>
               </a:rPr>
-              <a:t>General references — недостаточно; нужна точная индустриальная аналогия</a:t>
+              <a:t>Общих референсов недостаточно; нужна точная индустриальная аналогия</a:t>
             </a:r>
           </a:p>
         </p:txBody>
@@ -27949,7 +27669,7 @@
                 </a:solidFill>
                 <a:latin typeface="Arial"/>
               </a:rPr>
-              <a:t>Шаблон vendor question framework — для любого AI-пилота на производстве</a:t>
+              <a:t>Каркас вопросов вендору — для любого AI-пилота на производстве</a:t>
             </a:r>
           </a:p>
         </p:txBody>
@@ -28058,7 +27778,7 @@
                 </a:solidFill>
                 <a:latin typeface="Arial"/>
               </a:rPr>
-              <a:t>1. DT-2026</a:t>
+              <a:t>1. Двойник 2026</a:t>
             </a:r>
           </a:p>
         </p:txBody>
@@ -28797,7 +28517,7 @@
                 </a:solidFill>
                 <a:latin typeface="Arial"/>
               </a:rPr>
-              <a:t>Раздел 6 · 3 слайда · 6 минут</a:t>
+              <a:t>Раздел 6 · техническая инфраструктура промышленного AI</a:t>
             </a:r>
           </a:p>
         </p:txBody>
@@ -29071,7 +28791,7 @@
                 </a:solidFill>
                 <a:latin typeface="Arial"/>
               </a:rPr>
-              <a:t>критичный по безопасности всегда gated; HITL final authority</a:t>
+              <a:t>критичные по безопасности действия всегда требуют согласия; человек — финальная инстанция</a:t>
             </a:r>
           </a:p>
         </p:txBody>
@@ -29581,7 +29301,7 @@
                 </a:solidFill>
                 <a:latin typeface="Arial"/>
               </a:rPr>
-              <a:t>AI как advisory → замкнутая петля · диспетчер</a:t>
+              <a:t>AI как советующий → замкнутая петля · диспетчер</a:t>
             </a:r>
           </a:p>
         </p:txBody>
@@ -29712,7 +29432,7 @@
                 </a:solidFill>
                 <a:latin typeface="Arial"/>
               </a:rPr>
-              <a:t>3. Edge AI</a:t>
+              <a:t>3. ИИ на границе сети</a:t>
             </a:r>
           </a:p>
         </p:txBody>
@@ -29751,7 +29471,7 @@
                 </a:solidFill>
                 <a:latin typeface="Arial"/>
               </a:rPr>
-              <a:t>GPU micro-servers на шкафы оборудования · inference &lt;10 мс (NVIDIA Jetson)</a:t>
+              <a:t>промышленные ИИ-серверы на шкафах оборудования · инференс &lt;10 мс (NVIDIA Jetson)</a:t>
             </a:r>
           </a:p>
         </p:txBody>
@@ -29921,7 +29641,7 @@
                 </a:solidFill>
                 <a:latin typeface="Arial"/>
               </a:rPr>
-              <a:t>TSN — Time-Sensitive Networking, IEEE 802.1, детерминированная задержка</a:t>
+              <a:t>TSN — сеть с гарантированной задержкой, IEEE 802.1, детерминированный обмен</a:t>
             </a:r>
           </a:p>
         </p:txBody>
@@ -30091,7 +29811,7 @@
                 </a:solidFill>
                 <a:latin typeface="Arial"/>
               </a:rPr>
-              <a:t>IIoT — OPC UA + MQTT · sampling rate ≥10× полоса управления</a:t>
+              <a:t>IIoT — OPC UA + MQTT · частота опроса ≥10× полосы управления</a:t>
             </a:r>
           </a:p>
         </p:txBody>
@@ -30130,7 +29850,7 @@
                 </a:solidFill>
                 <a:latin typeface="Arial"/>
               </a:rPr>
-              <a:t>Стек распространяется через WEF Lighthouse Network — 220+ заводов 35 стран</a:t>
+              <a:t>Стек распространяется через WEF Lighthouse Network — 220+ заводов в 35 странах</a:t>
             </a:r>
           </a:p>
         </p:txBody>
@@ -30404,7 +30124,7 @@
                 </a:solidFill>
                 <a:latin typeface="Arial"/>
               </a:rPr>
-              <a:t>Open Platform Communications · Unified Architecture</a:t>
+              <a:t>Открытая платформа коммуникаций · единая архитектура</a:t>
             </a:r>
           </a:p>
           <a:p>
@@ -30500,7 +30220,7 @@
                 </a:solidFill>
                 <a:latin typeface="Arial"/>
               </a:rPr>
-              <a:t>Кодирует МЕЖДУ информацию: «это температура реактора», не просто число.</a:t>
+              <a:t>Кодирует смысл информации: «это температура реактора», а не просто число.</a:t>
             </a:r>
           </a:p>
           <a:p>
@@ -30718,7 +30438,7 @@
                 </a:solidFill>
                 <a:latin typeface="Arial"/>
               </a:rPr>
-              <a:t>Message Queue Telemetry Transport</a:t>
+              <a:t>Протокол передачи телеметрии через очередь сообщений</a:t>
             </a:r>
           </a:p>
           <a:p>
@@ -30814,7 +30534,7 @@
                 </a:solidFill>
                 <a:latin typeface="Arial"/>
               </a:rPr>
-              <a:t>Pub/sub broker для тысяч устройств; lightweight, реалистичен для IIoT с ограниченным каналом.</a:t>
+              <a:t>Брокер «публикация/подписка» для тысяч устройств; лёгкий, подходит для IIoT с ограниченным каналом.</a:t>
             </a:r>
           </a:p>
           <a:p>
@@ -31032,7 +30752,7 @@
                 </a:solidFill>
                 <a:latin typeface="Arial"/>
               </a:rPr>
-              <a:t>Time-Sensitive Networking</a:t>
+              <a:t>Сеть с гарантированной задержкой</a:t>
             </a:r>
           </a:p>
           <a:p>
@@ -31128,7 +30848,7 @@
                 </a:solidFill>
                 <a:latin typeface="Arial"/>
               </a:rPr>
-              <a:t>IEEE 802.1 · гарантированная задержка доставки Ethernet-пакетов. Без него ИИ на границе сети &lt;10 мс невозможен.</a:t>
+              <a:t>IEEE 802.1 · гарантированная задержка доставки Ethernet-пакетов. Без него инференс ИИ на границе сети &lt;10 мс невозможен.</a:t>
             </a:r>
           </a:p>
           <a:p>
@@ -31215,7 +30935,7 @@
                 </a:solidFill>
                 <a:latin typeface="Arial"/>
               </a:rPr>
-              <a:t>Без всех трёх — A2 невозможен; OPC UA-only хватает на A0–A1, но не для замыкания петли</a:t>
+              <a:t>Без всех трёх — A2 невозможен; только OPC UA хватает на A0–A1, но не для замыкания петли</a:t>
             </a:r>
           </a:p>
         </p:txBody>
@@ -31280,7 +31000,7 @@
                 </a:solidFill>
                 <a:latin typeface="Arial"/>
               </a:rPr>
-              <a:t>Lighthouse Network: 220+ заводов, 90% с AI, +16% EBIT</a:t>
+              <a:t>Lighthouse Network: 220+ заводов, 90% с AI, +16% EBIT vs peers</a:t>
             </a:r>
           </a:p>
         </p:txBody>
@@ -31319,7 +31039,7 @@
                 </a:solidFill>
                 <a:latin typeface="Arial"/>
               </a:rPr>
-              <a:t>Программа World Economic Forum + McKinsey — заводы-образцы с full AI-трансформацией</a:t>
+              <a:t>Программа Всемирного экономического форума и McKinsey — заводы-образцы с полной AI-трансформацией</a:t>
             </a:r>
           </a:p>
         </p:txBody>
@@ -31769,7 +31489,7 @@
                 </a:solidFill>
                 <a:latin typeface="Arial"/>
               </a:rPr>
-              <a:t>новых сайтов 2026</a:t>
+              <a:t>новых площадки в 2026</a:t>
             </a:r>
           </a:p>
         </p:txBody>
@@ -32021,7 +31741,7 @@
                 </a:solidFill>
                 <a:latin typeface="Arial"/>
               </a:rPr>
-              <a:t>EBIT vs peers</a:t>
+              <a:t>EBIT относительно сравнимых заводов</a:t>
             </a:r>
           </a:p>
         </p:txBody>
@@ -32060,7 +31780,7 @@
                 </a:solidFill>
                 <a:latin typeface="Arial"/>
               </a:rPr>
-              <a:t>World Economic Forum / McKinsey Lighthouse Network, январь 2026</a:t>
+              <a:t>Всемирный экономический форум / McKinsey Lighthouse Network, январь 2026</a:t>
             </a:r>
           </a:p>
         </p:txBody>
@@ -32169,7 +31889,7 @@
                 </a:solidFill>
                 <a:latin typeface="Arial"/>
               </a:rPr>
-              <a:t>1. DT-2026</a:t>
+              <a:t>1. Двойник 2026</a:t>
             </a:r>
           </a:p>
         </p:txBody>
@@ -32908,7 +32628,7 @@
                 </a:solidFill>
                 <a:latin typeface="Arial"/>
               </a:rPr>
-              <a:t>Раздел 7 · 2 слайда · 5 минут</a:t>
+              <a:t>Раздел 7 · отечественные кейсы и точки входа в индустрию</a:t>
             </a:r>
           </a:p>
         </p:txBody>
@@ -33075,7 +32795,7 @@
                 </a:solidFill>
                 <a:latin typeface="Arial"/>
               </a:rPr>
-              <a:t>KAMAZ-43118 · Wikimedia · CC-BY-SA · пилот цифровых двойников РФ с 2020</a:t>
+              <a:t>КАМАЗ-43118 · Wikimedia · CC-BY-SA · пилот цифровых двойников РФ с 2020</a:t>
             </a:r>
           </a:p>
         </p:txBody>
@@ -33284,7 +33004,7 @@
                 </a:solidFill>
                 <a:latin typeface="Arial"/>
               </a:rPr>
-              <a:t>конвейер + R&amp;D · КАМА-1 e-vehicle 2020+</a:t>
+              <a:t>конвейер + НИОКР · электромобиль КАМА-1 c 2020</a:t>
             </a:r>
           </a:p>
         </p:txBody>
@@ -33493,7 +33213,7 @@
                 </a:solidFill>
                 <a:latin typeface="Arial"/>
               </a:rPr>
-              <a:t>T-FLEX PLM · АтомМайнд 2024+</a:t>
+              <a:t>T-FLEX PLM · АтомМайнд с 2024</a:t>
             </a:r>
           </a:p>
         </p:txBody>
@@ -33663,7 +33383,7 @@
                 </a:solidFill>
                 <a:latin typeface="Arial"/>
               </a:rPr>
-              <a:t>Process-control AI на flotation</a:t>
+              <a:t>Управление процессом флотации через ИИ</a:t>
             </a:r>
           </a:p>
         </p:txBody>
@@ -34024,8 +33744,8 @@
                 </a:solidFill>
                 <a:latin typeface="Arial"/>
               </a:rPr>
-              <a:t>AI/ML engineer
-(industrial)</a:t>
+              <a:t>Инженер ИИ/МО
+(промышленный)</a:t>
             </a:r>
           </a:p>
         </p:txBody>
@@ -34080,7 +33800,7 @@
                 </a:solidFill>
                 <a:latin typeface="Arial"/>
               </a:rPr>
-              <a:t>Дизайнит и тренирует модели (vision QC, PdM, alarm); интегрирует в edge runtime; мониторит drift</a:t>
+              <a:t>Проектирует и обучает модели (Vision QC, прогн. обслуживание, тревоги); встраивает в среду исполнения на границе сети; следит за дрейфом</a:t>
             </a:r>
           </a:p>
           <a:p>
@@ -34122,7 +33842,7 @@
               </a:lnSpc>
             </a:pPr>
             <a:r>
-              <a:rPr sz="1100" b="0" i="1">
+              <a:rPr sz="1000" b="0" i="1">
                 <a:solidFill>
                   <a:srgbClr val="4A556B"/>
                 </a:solidFill>
@@ -34259,8 +33979,8 @@
                 </a:solidFill>
                 <a:latin typeface="Arial"/>
               </a:rPr>
-              <a:t>Digital twin
-engineer</a:t>
+              <a:t>Инженер цифровых
+двойников</a:t>
             </a:r>
           </a:p>
         </p:txBody>
@@ -34315,7 +34035,7 @@
                 </a:solidFill>
                 <a:latin typeface="Arial"/>
               </a:rPr>
-              <a:t>Строит и поддерживает twin: датчики через OPC UA, физика + ML модель оборудования, валидация точности</a:t>
+              <a:t>Строит и поддерживает двойник: датчики через OPC UA, физика + ML-модель оборудования, валидация точности</a:t>
             </a:r>
           </a:p>
           <a:p>
@@ -34357,13 +34077,13 @@
               </a:lnSpc>
             </a:pPr>
             <a:r>
-              <a:rPr sz="1100" b="0" i="1">
+              <a:rPr sz="1000" b="0" i="1">
                 <a:solidFill>
                   <a:srgbClr val="4A556B"/>
                 </a:solidFill>
                 <a:latin typeface="Arial"/>
               </a:rPr>
-              <a:t>Siemens Composer · NVIDIA Omniverse · PTC ThingWorx · CAD · OPC UA</a:t>
+              <a:t>Siemens Composer · NVIDIA Omniverse · PTC ThingWorx · САПР · OPC UA</a:t>
             </a:r>
           </a:p>
         </p:txBody>
@@ -34494,8 +34214,8 @@
                 </a:solidFill>
                 <a:latin typeface="Arial"/>
               </a:rPr>
-              <a:t>MES integration
-specialist</a:t>
+              <a:t>Специалист по
+интеграции MES</a:t>
             </a:r>
           </a:p>
         </p:txBody>
@@ -34550,7 +34270,7 @@
                 </a:solidFill>
                 <a:latin typeface="Arial"/>
               </a:rPr>
-              <a:t>Внедряет advisory-AI в существующий MES; конфигурирует workflow «рекомендация → апрув → исполнение»</a:t>
+              <a:t>Внедряет советующий AI в существующий MES; настраивает процесс «рекомендация → согласие → исполнение»</a:t>
             </a:r>
           </a:p>
           <a:p>
@@ -34592,7 +34312,7 @@
               </a:lnSpc>
             </a:pPr>
             <a:r>
-              <a:rPr sz="1100" b="0" i="1">
+              <a:rPr sz="1000" b="0" i="1">
                 <a:solidFill>
                   <a:srgbClr val="4A556B"/>
                 </a:solidFill>
@@ -34729,8 +34449,8 @@
                 </a:solidFill>
                 <a:latin typeface="Arial"/>
               </a:rPr>
-              <a:t>Edge AI
-engineer</a:t>
+              <a:t>Инженер ИИ на
+границе сети</a:t>
             </a:r>
           </a:p>
         </p:txBody>
@@ -34785,7 +34505,7 @@
                 </a:solidFill>
                 <a:latin typeface="Arial"/>
               </a:rPr>
-              <a:t>Деплоит inference на edge (Jetson, Modicon edge); оптимизирует latency, разрабатывает безопасная передача управления</a:t>
+              <a:t>Развёртывает инференс на пограничных серверах (Jetson, Modicon edge); оптимизирует задержку, разрабатывает безопасную передачу управления</a:t>
             </a:r>
           </a:p>
           <a:p>
@@ -34827,13 +34547,13 @@
               </a:lnSpc>
             </a:pPr>
             <a:r>
-              <a:rPr sz="1100" b="0" i="1">
+              <a:rPr sz="1000" b="0" i="1">
                 <a:solidFill>
                   <a:srgbClr val="4A556B"/>
                 </a:solidFill>
                 <a:latin typeface="Arial"/>
               </a:rPr>
-              <a:t>C++/Rust · встроенный Linux · ONNX/TensorRT · планирование в реальном времени · КИИ-cybersecurity</a:t>
+              <a:t>C++/Rust · встроенный Linux · ONNX/TensorRT · планирование в реальном времени · кибербезопасность КИИ</a:t>
             </a:r>
           </a:p>
         </p:txBody>
@@ -34920,7 +34640,7 @@
                 </a:solidFill>
                 <a:latin typeface="Arial"/>
               </a:rPr>
-              <a:t>Где учиться: профильные технические магистратуры по AI в промышленности + Coursera/edX курсы NVIDIA Omniverse, Siemens Industrial AI</a:t>
+              <a:t>Где учиться: профильные технические магистратуры по AI в промышленности + онлайн-курсы NVIDIA Omniverse, Siemens Industrial AI</a:t>
             </a:r>
           </a:p>
         </p:txBody>
@@ -34953,7 +34673,7 @@
       <p:grpSpPr/>
       <p:pic>
         <p:nvPicPr>
-          <p:cNvPr id="2" name="Picture 1" descr="s39-toyota-line.jpg"/>
+          <p:cNvPr id="2" name="Picture 1" descr="s39-cassie-digit.jpg"/>
           <p:cNvPicPr>
             <a:picLocks noChangeAspect="1"/>
           </p:cNvPicPr>
@@ -34967,8 +34687,8 @@
         </p:blipFill>
         <p:spPr>
           <a:xfrm>
-            <a:off x="457200" y="457200"/>
-            <a:ext cx="5943600" cy="5486400"/>
+            <a:off x="365760" y="457200"/>
+            <a:ext cx="6126480" cy="5486400"/>
           </a:xfrm>
           <a:prstGeom prst="rect">
             <a:avLst/>
@@ -34983,8 +34703,8 @@
         </p:nvSpPr>
         <p:spPr>
           <a:xfrm>
-            <a:off x="457200" y="5989320"/>
-            <a:ext cx="5943600" cy="274320"/>
+            <a:off x="365760" y="5989320"/>
+            <a:ext cx="6126480" cy="274320"/>
           </a:xfrm>
           <a:prstGeom prst="rect">
             <a:avLst/>
@@ -35009,7 +34729,7 @@
                 </a:solidFill>
                 <a:latin typeface="Arial"/>
               </a:rPr>
-              <a:t>Toyota Motor Manufacturing · Burnaston Derby · Wikimedia · CC-BY-SA</a:t>
+              <a:t>Cassie · Agility Robotics (компания-производитель Digit) · Oregon State · Wikimedia · CC-BY-SA</a:t>
             </a:r>
           </a:p>
         </p:txBody>
@@ -35215,7 +34935,7 @@
                 </a:solidFill>
                 <a:latin typeface="Arial"/>
               </a:rPr>
-              <a:t>· A0: vision QC + PdM с границами</a:t>
+              <a:t>· A0: Vision QC + прогн. обслуживание с границами</a:t>
             </a:r>
           </a:p>
           <a:p>
@@ -35231,7 +34951,7 @@
                 </a:solidFill>
                 <a:latin typeface="Arial"/>
               </a:rPr>
-              <a:t>· A1: MES + alarm + PLC Copilot (purpose-built)</a:t>
+              <a:t>· A1: MES + предсказание тревог + PLC Copilot</a:t>
             </a:r>
           </a:p>
           <a:p>
@@ -35247,7 +34967,7 @@
                 </a:solidFill>
                 <a:latin typeface="Arial"/>
               </a:rPr>
-              <a:t>· A2: RL + twin как песочница (Yokogawa)</a:t>
+              <a:t>· A2: RL + двойник как песочница (Yokogawa)</a:t>
             </a:r>
           </a:p>
           <a:p>
@@ -35263,7 +34983,7 @@
                 </a:solidFill>
                 <a:latin typeface="Arial"/>
               </a:rPr>
-              <a:t>· A3: humanoid логистика — единично</a:t>
+              <a:t>· A3: humanoid-логистика — единично</a:t>
             </a:r>
           </a:p>
           <a:p>
@@ -35446,7 +35166,7 @@
                 </a:solidFill>
                 <a:latin typeface="Arial"/>
               </a:rPr>
-              <a:t>Toyota Digit между станциями — первая ступень supply chain</a:t>
+              <a:t>Toyota Digit между станциями — первая ступень цепочки поставок</a:t>
             </a:r>
           </a:p>
         </p:txBody>
@@ -36782,7 +36502,7 @@
                 </a:solidFill>
                 <a:latin typeface="Arial"/>
               </a:rPr>
-              <a:t>AI принимает решения без человека с защитные ограничения</a:t>
+              <a:t>AI принимает решения без человека, c защитными ограничениями</a:t>
             </a:r>
           </a:p>
         </p:txBody>
@@ -36790,6 +36510,221 @@
       <p:sp>
         <p:nvSpPr>
           <p:cNvPr id="33" name="Rounded Rectangle 32"/>
+          <p:cNvSpPr/>
+          <p:nvPr/>
+        </p:nvSpPr>
+        <p:spPr>
+          <a:xfrm>
+            <a:off x="5806440" y="3657600"/>
+            <a:ext cx="731520" cy="640080"/>
+          </a:xfrm>
+          <a:prstGeom prst="roundRect">
+            <a:avLst>
+              <a:gd name="adj" fmla="val 10000"/>
+            </a:avLst>
+          </a:prstGeom>
+          <a:solidFill>
+            <a:srgbClr val="F0AB00"/>
+          </a:solidFill>
+          <a:ln w="25400">
+            <a:solidFill>
+              <a:srgbClr val="F0AB00"/>
+            </a:solidFill>
+          </a:ln>
+          <a:effectLst/>
+        </p:spPr>
+        <p:style>
+          <a:lnRef idx="1">
+            <a:schemeClr val="accent1"/>
+          </a:lnRef>
+          <a:fillRef idx="3">
+            <a:schemeClr val="accent1"/>
+          </a:fillRef>
+          <a:effectRef idx="2">
+            <a:schemeClr val="accent1"/>
+          </a:effectRef>
+          <a:fontRef idx="minor">
+            <a:schemeClr val="lt1"/>
+          </a:fontRef>
+        </p:style>
+        <p:txBody>
+          <a:bodyPr rtlCol="0" anchor="ctr"/>
+          <a:lstStyle/>
+          <a:p>
+            <a:pPr algn="ctr"/>
+          </a:p>
+        </p:txBody>
+      </p:sp>
+      <p:sp>
+        <p:nvSpPr>
+          <p:cNvPr id="34" name="TextBox 33"/>
+          <p:cNvSpPr txBox="1"/>
+          <p:nvPr/>
+        </p:nvSpPr>
+        <p:spPr>
+          <a:xfrm>
+            <a:off x="5806440" y="3657600"/>
+            <a:ext cx="731520" cy="640080"/>
+          </a:xfrm>
+          <a:prstGeom prst="rect">
+            <a:avLst/>
+          </a:prstGeom>
+          <a:noFill/>
+        </p:spPr>
+        <p:txBody>
+          <a:bodyPr wrap="square" lIns="0" rIns="0" tIns="0" bIns="0" anchor="ctr">
+            <a:spAutoFit/>
+          </a:bodyPr>
+          <a:lstStyle/>
+          <a:p>
+            <a:pPr algn="ctr">
+              <a:lnSpc>
+                <a:spcPct val="115000"/>
+              </a:lnSpc>
+            </a:pPr>
+            <a:r>
+              <a:rPr sz="1400" b="1" i="0">
+                <a:solidFill>
+                  <a:srgbClr val="FFFFFF"/>
+                </a:solidFill>
+                <a:latin typeface="Arial"/>
+              </a:rPr>
+              <a:t>DT</a:t>
+            </a:r>
+          </a:p>
+        </p:txBody>
+      </p:sp>
+      <p:sp>
+        <p:nvSpPr>
+          <p:cNvPr id="35" name="Right Arrow 34"/>
+          <p:cNvSpPr/>
+          <p:nvPr/>
+        </p:nvSpPr>
+        <p:spPr>
+          <a:xfrm>
+            <a:off x="5623560" y="3886200"/>
+            <a:ext cx="164592" cy="182880"/>
+          </a:xfrm>
+          <a:prstGeom prst="rightArrow">
+            <a:avLst/>
+          </a:prstGeom>
+          <a:solidFill>
+            <a:srgbClr val="F0AB00"/>
+          </a:solidFill>
+          <a:ln>
+            <a:noFill/>
+          </a:ln>
+          <a:effectLst/>
+        </p:spPr>
+        <p:style>
+          <a:lnRef idx="1">
+            <a:schemeClr val="accent1"/>
+          </a:lnRef>
+          <a:fillRef idx="3">
+            <a:schemeClr val="accent1"/>
+          </a:fillRef>
+          <a:effectRef idx="2">
+            <a:schemeClr val="accent1"/>
+          </a:effectRef>
+          <a:fontRef idx="minor">
+            <a:schemeClr val="lt1"/>
+          </a:fontRef>
+        </p:style>
+        <p:txBody>
+          <a:bodyPr rtlCol="0" anchor="ctr"/>
+          <a:lstStyle/>
+          <a:p>
+            <a:pPr algn="ctr"/>
+          </a:p>
+        </p:txBody>
+      </p:sp>
+      <p:sp>
+        <p:nvSpPr>
+          <p:cNvPr id="36" name="Right Arrow 35"/>
+          <p:cNvSpPr/>
+          <p:nvPr/>
+        </p:nvSpPr>
+        <p:spPr>
+          <a:xfrm>
+            <a:off x="6565392" y="3886200"/>
+            <a:ext cx="164592" cy="182880"/>
+          </a:xfrm>
+          <a:prstGeom prst="rightArrow">
+            <a:avLst/>
+          </a:prstGeom>
+          <a:solidFill>
+            <a:srgbClr val="F0AB00"/>
+          </a:solidFill>
+          <a:ln>
+            <a:noFill/>
+          </a:ln>
+          <a:effectLst/>
+        </p:spPr>
+        <p:style>
+          <a:lnRef idx="1">
+            <a:schemeClr val="accent1"/>
+          </a:lnRef>
+          <a:fillRef idx="3">
+            <a:schemeClr val="accent1"/>
+          </a:fillRef>
+          <a:effectRef idx="2">
+            <a:schemeClr val="accent1"/>
+          </a:effectRef>
+          <a:fontRef idx="minor">
+            <a:schemeClr val="lt1"/>
+          </a:fontRef>
+        </p:style>
+        <p:txBody>
+          <a:bodyPr rtlCol="0" anchor="ctr"/>
+          <a:lstStyle/>
+          <a:p>
+            <a:pPr algn="ctr"/>
+          </a:p>
+        </p:txBody>
+      </p:sp>
+      <p:sp>
+        <p:nvSpPr>
+          <p:cNvPr id="37" name="TextBox 36"/>
+          <p:cNvSpPr txBox="1"/>
+          <p:nvPr/>
+        </p:nvSpPr>
+        <p:spPr>
+          <a:xfrm>
+            <a:off x="5349240" y="4389120"/>
+            <a:ext cx="1645920" cy="274320"/>
+          </a:xfrm>
+          <a:prstGeom prst="rect">
+            <a:avLst/>
+          </a:prstGeom>
+          <a:noFill/>
+        </p:spPr>
+        <p:txBody>
+          <a:bodyPr wrap="square" lIns="0" rIns="0" tIns="0" bIns="0" anchor="t">
+            <a:spAutoFit/>
+          </a:bodyPr>
+          <a:lstStyle/>
+          <a:p>
+            <a:pPr algn="ctr">
+              <a:lnSpc>
+                <a:spcPct val="110000"/>
+              </a:lnSpc>
+            </a:pPr>
+            <a:r>
+              <a:rPr sz="1000" b="1" i="1">
+                <a:solidFill>
+                  <a:srgbClr val="F0AB00"/>
+                </a:solidFill>
+                <a:latin typeface="Arial"/>
+              </a:rPr>
+              <a:t>двойник =
+мост</a:t>
+            </a:r>
+          </a:p>
+        </p:txBody>
+      </p:sp>
+      <p:sp>
+        <p:nvSpPr>
+          <p:cNvPr id="38" name="Rounded Rectangle 37"/>
           <p:cNvSpPr/>
           <p:nvPr/>
         </p:nvSpPr>
@@ -36837,7 +36772,7 @@
       </p:sp>
       <p:sp>
         <p:nvSpPr>
-          <p:cNvPr id="34" name="TextBox 33"/>
+          <p:cNvPr id="39" name="TextBox 38"/>
           <p:cNvSpPr txBox="1"/>
           <p:nvPr/>
         </p:nvSpPr>
@@ -36978,7 +36913,7 @@
                 </a:solidFill>
                 <a:latin typeface="Arial"/>
               </a:rPr>
-              <a:t>1. DT-2026</a:t>
+              <a:t>1. Двойник 2026</a:t>
             </a:r>
           </a:p>
         </p:txBody>
@@ -37717,7 +37652,7 @@
                 </a:solidFill>
                 <a:latin typeface="Arial"/>
               </a:rPr>
-              <a:t>Раздел 1 · 5 слайдов · 10 минут</a:t>
+              <a:t>Раздел 1 · от определения к рыночной картине</a:t>
             </a:r>
           </a:p>
         </p:txBody>
@@ -37821,7 +37756,7 @@
                 </a:solidFill>
                 <a:latin typeface="Arial"/>
               </a:rPr>
-              <a:t>Kritzinger 2018 taxonomy + ГОСТ Р 57700.37-2021 — два эталонных определения</a:t>
+              <a:t>Таксономия Kritzinger 2018 + ГОСТ Р 57700.37-2021 — два эталонных определения</a:t>
             </a:r>
           </a:p>
         </p:txBody>
@@ -37991,7 +37926,7 @@
                 </a:solidFill>
                 <a:latin typeface="Arial"/>
               </a:rPr>
-              <a:t>Digital Model</a:t>
+              <a:t>(Digital Model)</a:t>
             </a:r>
           </a:p>
         </p:txBody>
@@ -38046,7 +37981,7 @@
                 </a:solidFill>
                 <a:latin typeface="Arial"/>
               </a:rPr>
-              <a:t>Нет потока данных с физического объекта</a:t>
+              <a:t>Нет потока данных от физического объекта</a:t>
             </a:r>
           </a:p>
           <a:p>
@@ -38312,7 +38247,7 @@
                 </a:solidFill>
                 <a:latin typeface="Arial"/>
               </a:rPr>
-              <a:t>Digital Shadow</a:t>
+              <a:t>(Digital Shadow)</a:t>
             </a:r>
           </a:p>
         </p:txBody>
@@ -38367,7 +38302,7 @@
                 </a:solidFill>
                 <a:latin typeface="Arial"/>
               </a:rPr>
-              <a:t>Поток physical → digital</a:t>
+              <a:t>Поток физика → цифра</a:t>
             </a:r>
           </a:p>
           <a:p>
@@ -38463,7 +38398,7 @@
                 </a:solidFill>
                 <a:latin typeface="Arial"/>
               </a:rPr>
-              <a:t>Пример: dashboard мониторинга</a:t>
+              <a:t>Пример: панель мониторинга</a:t>
             </a:r>
           </a:p>
         </p:txBody>
@@ -38633,7 +38568,7 @@
                 </a:solidFill>
                 <a:latin typeface="Arial"/>
               </a:rPr>
-              <a:t>Digital Twin</a:t>
+              <a:t>(Digital Twin)</a:t>
             </a:r>
           </a:p>
         </p:txBody>
@@ -38688,7 +38623,7 @@
                 </a:solidFill>
                 <a:latin typeface="Arial"/>
               </a:rPr>
-              <a:t>Двусторонняя петля physical ↔ digital</a:t>
+              <a:t>Двусторонняя петля физика ↔ цифра</a:t>
             </a:r>
           </a:p>
           <a:p>
@@ -38871,7 +38806,7 @@
                 </a:solidFill>
                 <a:latin typeface="Arial"/>
               </a:rPr>
-              <a:t>ГОСТ Р 57700.37-2021 «Цифровые двойники изделий. Общие положения» — формальная регуляторная база РФ; синхронизирует Kritzinger taxonomy</a:t>
+              <a:t>ГОСТ Р 57700.37-2021 «Цифровые двойники изделий. Общие положения» — формальная регуляторная база РФ; синхронизирует таксономию Kritzinger</a:t>
             </a:r>
           </a:p>
         </p:txBody>
@@ -38997,7 +38932,7 @@
         <p:spPr>
           <a:xfrm>
             <a:off x="457200" y="1645920"/>
-            <a:ext cx="4572000" cy="4572000"/>
+            <a:ext cx="3291840" cy="4572000"/>
           </a:xfrm>
           <a:prstGeom prst="rect">
             <a:avLst/>
@@ -39013,7 +38948,7 @@
         <p:spPr>
           <a:xfrm>
             <a:off x="457200" y="6263640"/>
-            <a:ext cx="4572000" cy="274320"/>
+            <a:ext cx="3291840" cy="274320"/>
           </a:xfrm>
           <a:prstGeom prst="rect">
             <a:avLst/>
@@ -39038,7 +38973,7 @@
                 </a:solidFill>
                 <a:latin typeface="Arial"/>
               </a:rPr>
-              <a:t>Siemens HQ Munich · Wikimedia · CC-BY-SA · «The Wings»</a:t>
+              <a:t>Siemens HQ Munich · Wikimedia · CC-BY-SA</a:t>
             </a:r>
           </a:p>
         </p:txBody>
@@ -39051,8 +38986,8 @@
         </p:nvSpPr>
         <p:spPr>
           <a:xfrm>
-            <a:off x="5303520" y="1691640"/>
-            <a:ext cx="6400800" cy="1051560"/>
+            <a:off x="4114800" y="1691640"/>
+            <a:ext cx="7589520" cy="1097280"/>
           </a:xfrm>
           <a:prstGeom prst="roundRect">
             <a:avLst>
@@ -39099,8 +39034,8 @@
         </p:nvSpPr>
         <p:spPr>
           <a:xfrm>
-            <a:off x="5303520" y="1691640"/>
-            <a:ext cx="457200" cy="1051560"/>
+            <a:off x="4114800" y="1691640"/>
+            <a:ext cx="457200" cy="1097280"/>
           </a:xfrm>
           <a:prstGeom prst="rect">
             <a:avLst/>
@@ -39143,8 +39078,8 @@
         </p:nvSpPr>
         <p:spPr>
           <a:xfrm>
-            <a:off x="5943600" y="1783080"/>
-            <a:ext cx="5669280" cy="457200"/>
+            <a:off x="4754880" y="1828800"/>
+            <a:ext cx="6858000" cy="457200"/>
           </a:xfrm>
           <a:prstGeom prst="rect">
             <a:avLst/>
@@ -39163,13 +39098,13 @@
               </a:lnSpc>
             </a:pPr>
             <a:r>
-              <a:rPr sz="1500" b="1" i="0">
+              <a:rPr sz="1700" b="1" i="0">
                 <a:solidFill>
                   <a:srgbClr val="21295C"/>
                 </a:solidFill>
                 <a:latin typeface="Arial"/>
               </a:rPr>
-              <a:t>4. AI-потребители</a:t>
+              <a:t>4. ИИ-потребители</a:t>
             </a:r>
           </a:p>
         </p:txBody>
@@ -39182,8 +39117,8 @@
         </p:nvSpPr>
         <p:spPr>
           <a:xfrm>
-            <a:off x="5943600" y="2240280"/>
-            <a:ext cx="5669280" cy="457200"/>
+            <a:off x="4754880" y="2331720"/>
+            <a:ext cx="6858000" cy="457200"/>
           </a:xfrm>
           <a:prstGeom prst="rect">
             <a:avLst/>
@@ -39202,13 +39137,13 @@
               </a:lnSpc>
             </a:pPr>
             <a:r>
-              <a:rPr sz="1200" b="0" i="1">
+              <a:rPr sz="1300" b="0" i="1">
                 <a:solidFill>
                   <a:srgbClr val="4A556B"/>
                 </a:solidFill>
                 <a:latin typeface="Arial"/>
               </a:rPr>
-              <a:t>Vision QC · оптимизатор · RL-агент · operator UI</a:t>
+              <a:t>Vision QC · оптимизатор · RL-агент · интерфейс оператора</a:t>
             </a:r>
           </a:p>
         </p:txBody>
@@ -39221,8 +39156,8 @@
         </p:nvSpPr>
         <p:spPr>
           <a:xfrm>
-            <a:off x="5303520" y="2834640"/>
-            <a:ext cx="6400800" cy="1051560"/>
+            <a:off x="4114800" y="2880360"/>
+            <a:ext cx="7589520" cy="1097280"/>
           </a:xfrm>
           <a:prstGeom prst="roundRect">
             <a:avLst>
@@ -39269,8 +39204,8 @@
         </p:nvSpPr>
         <p:spPr>
           <a:xfrm>
-            <a:off x="5303520" y="2834640"/>
-            <a:ext cx="457200" cy="1051560"/>
+            <a:off x="4114800" y="2880360"/>
+            <a:ext cx="457200" cy="1097280"/>
           </a:xfrm>
           <a:prstGeom prst="rect">
             <a:avLst/>
@@ -39313,8 +39248,8 @@
         </p:nvSpPr>
         <p:spPr>
           <a:xfrm>
-            <a:off x="5943600" y="2926080"/>
-            <a:ext cx="5669280" cy="457200"/>
+            <a:off x="4754880" y="3017520"/>
+            <a:ext cx="6858000" cy="457200"/>
           </a:xfrm>
           <a:prstGeom prst="rect">
             <a:avLst/>
@@ -39333,7 +39268,7 @@
               </a:lnSpc>
             </a:pPr>
             <a:r>
-              <a:rPr sz="1500" b="1" i="0">
+              <a:rPr sz="1700" b="1" i="0">
                 <a:solidFill>
                   <a:srgbClr val="21295C"/>
                 </a:solidFill>
@@ -39352,8 +39287,8 @@
         </p:nvSpPr>
         <p:spPr>
           <a:xfrm>
-            <a:off x="5943600" y="3383280"/>
-            <a:ext cx="5669280" cy="457200"/>
+            <a:off x="4754880" y="3520440"/>
+            <a:ext cx="6858000" cy="457200"/>
           </a:xfrm>
           <a:prstGeom prst="rect">
             <a:avLst/>
@@ -39372,7 +39307,7 @@
               </a:lnSpc>
             </a:pPr>
             <a:r>
-              <a:rPr sz="1200" b="0" i="1">
+              <a:rPr sz="1300" b="0" i="1">
                 <a:solidFill>
                   <a:srgbClr val="4A556B"/>
                 </a:solidFill>
@@ -39391,8 +39326,8 @@
         </p:nvSpPr>
         <p:spPr>
           <a:xfrm>
-            <a:off x="5303520" y="3977639"/>
-            <a:ext cx="6400800" cy="1051560"/>
+            <a:off x="4114800" y="4069080"/>
+            <a:ext cx="7589520" cy="1097280"/>
           </a:xfrm>
           <a:prstGeom prst="roundRect">
             <a:avLst>
@@ -39439,8 +39374,8 @@
         </p:nvSpPr>
         <p:spPr>
           <a:xfrm>
-            <a:off x="5303520" y="3977639"/>
-            <a:ext cx="457200" cy="1051560"/>
+            <a:off x="4114800" y="4069080"/>
+            <a:ext cx="457200" cy="1097280"/>
           </a:xfrm>
           <a:prstGeom prst="rect">
             <a:avLst/>
@@ -39483,8 +39418,8 @@
         </p:nvSpPr>
         <p:spPr>
           <a:xfrm>
-            <a:off x="5943600" y="4069079"/>
-            <a:ext cx="5669280" cy="457200"/>
+            <a:off x="4754880" y="4206240"/>
+            <a:ext cx="6858000" cy="457200"/>
           </a:xfrm>
           <a:prstGeom prst="rect">
             <a:avLst/>
@@ -39503,7 +39438,7 @@
               </a:lnSpc>
             </a:pPr>
             <a:r>
-              <a:rPr sz="1500" b="1" i="0">
+              <a:rPr sz="1700" b="1" i="0">
                 <a:solidFill>
                   <a:srgbClr val="21295C"/>
                 </a:solidFill>
@@ -39522,8 +39457,8 @@
         </p:nvSpPr>
         <p:spPr>
           <a:xfrm>
-            <a:off x="5943600" y="4526279"/>
-            <a:ext cx="5669280" cy="457200"/>
+            <a:off x="4754880" y="4709160"/>
+            <a:ext cx="6858000" cy="457200"/>
           </a:xfrm>
           <a:prstGeom prst="rect">
             <a:avLst/>
@@ -39542,13 +39477,13 @@
               </a:lnSpc>
             </a:pPr>
             <a:r>
-              <a:rPr sz="1200" b="0" i="1">
+              <a:rPr sz="1300" b="0" i="1">
                 <a:solidFill>
                   <a:srgbClr val="4A556B"/>
                 </a:solidFill>
                 <a:latin typeface="Arial"/>
               </a:rPr>
-              <a:t>OPC UA + MQTT · sampling rate ≥10× полоса управления</a:t>
+              <a:t>OPC UA + MQTT · частота опроса ≥10× полосы управления</a:t>
             </a:r>
           </a:p>
         </p:txBody>
@@ -39561,8 +39496,8 @@
         </p:nvSpPr>
         <p:spPr>
           <a:xfrm>
-            <a:off x="5303520" y="5120640"/>
-            <a:ext cx="6400800" cy="1051560"/>
+            <a:off x="4114800" y="5257800"/>
+            <a:ext cx="7589520" cy="1097280"/>
           </a:xfrm>
           <a:prstGeom prst="roundRect">
             <a:avLst>
@@ -39609,8 +39544,8 @@
         </p:nvSpPr>
         <p:spPr>
           <a:xfrm>
-            <a:off x="5303520" y="5120640"/>
-            <a:ext cx="457200" cy="1051560"/>
+            <a:off x="4114800" y="5257800"/>
+            <a:ext cx="457200" cy="1097280"/>
           </a:xfrm>
           <a:prstGeom prst="rect">
             <a:avLst/>
@@ -39653,8 +39588,8 @@
         </p:nvSpPr>
         <p:spPr>
           <a:xfrm>
-            <a:off x="5943600" y="5212079"/>
-            <a:ext cx="5669280" cy="457200"/>
+            <a:off x="4754880" y="5394960"/>
+            <a:ext cx="6858000" cy="457200"/>
           </a:xfrm>
           <a:prstGeom prst="rect">
             <a:avLst/>
@@ -39673,7 +39608,7 @@
               </a:lnSpc>
             </a:pPr>
             <a:r>
-              <a:rPr sz="1500" b="1" i="0">
+              <a:rPr sz="1700" b="1" i="0">
                 <a:solidFill>
                   <a:srgbClr val="21295C"/>
                 </a:solidFill>
@@ -39692,8 +39627,8 @@
         </p:nvSpPr>
         <p:spPr>
           <a:xfrm>
-            <a:off x="5943600" y="5669279"/>
-            <a:ext cx="5669280" cy="457200"/>
+            <a:off x="4754880" y="5897880"/>
+            <a:ext cx="6858000" cy="457200"/>
           </a:xfrm>
           <a:prstGeom prst="rect">
             <a:avLst/>
@@ -39712,7 +39647,7 @@
               </a:lnSpc>
             </a:pPr>
             <a:r>
-              <a:rPr sz="1200" b="0" i="1">
+              <a:rPr sz="1300" b="0" i="1">
                 <a:solidFill>
                   <a:srgbClr val="4A556B"/>
                 </a:solidFill>
@@ -39731,7 +39666,7 @@
         </p:nvSpPr>
         <p:spPr>
           <a:xfrm>
-            <a:off x="5074920" y="2194560"/>
+            <a:off x="3886200" y="2194560"/>
             <a:ext cx="274320" cy="4114800"/>
           </a:xfrm>
           <a:prstGeom prst="rect">
@@ -40245,7 +40180,7 @@
                 </a:solidFill>
                 <a:latin typeface="Arial"/>
               </a:rPr>
-              <a:t>PatSnap / StartUs / Standard Bots / TheElec / EY / context-clue.com 2026</a:t>
+              <a:t>PatSnap / StartUs / Standard Bots / TheElec / EY / Build in Digital [41] 2024–2025</a:t>
             </a:r>
           </a:p>
         </p:txBody>
@@ -40310,7 +40245,7 @@
                 </a:solidFill>
                 <a:latin typeface="Arial"/>
               </a:rPr>
-              <a:t>Southeast Asian Port: $12 миллионов, 18 месяцев, списан 2024</a:t>
+              <a:t>Цифровой двойник морского порта (анонимный кейс): $12 млн, 18 месяцев, списан 2024</a:t>
             </a:r>
           </a:p>
         </p:txBody>
@@ -40349,7 +40284,7 @@
                 </a:solidFill>
                 <a:latin typeface="Arial"/>
               </a:rPr>
-              <a:t>Цифровой двойник морского порта — 3D-визуализация без слоя данных = музей, не twin</a:t>
+              <a:t>Двойник морского порта — 3D-визуализация без слоя данных = музей, а не двойник</a:t>
             </a:r>
           </a:p>
         </p:txBody>
@@ -40412,7 +40347,7 @@
                 </a:solidFill>
                 <a:latin typeface="Arial"/>
               </a:rPr>
-              <a:t>Container port Singapore · Tanjong Pagar Terminal · Wikimedia · CC-BY-SA</a:t>
+              <a:t>Контейнерный порт Сингапура · Tanjong Pagar Terminal · Wikimedia · CC-BY-SA</a:t>
             </a:r>
           </a:p>
         </p:txBody>
@@ -40678,7 +40613,7 @@
                 </a:solidFill>
                 <a:latin typeface="Arial"/>
               </a:rPr>
-              <a:t>1. Фрагментированные данные из 5 источников без unified schema</a:t>
+              <a:t>1. Фрагментированные данные из 5 источников без единой схемы</a:t>
             </a:r>
           </a:p>
           <a:p>
@@ -40710,7 +40645,7 @@
                 </a:solidFill>
                 <a:latin typeface="Arial"/>
               </a:rPr>
-              <a:t>3. Не определён clear применение — что именно twin должен оптимизировать</a:t>
+              <a:t>3. Не определён чёткий сценарий — что именно двойник должен оптимизировать</a:t>
             </a:r>
           </a:p>
         </p:txBody>

--- a/library/lectures/lec-12/rendered/lec-12.pptx
+++ b/library/lectures/lec-12/rendered/lec-12.pptx
@@ -9253,7 +9253,7 @@
         </p:nvSpPr>
         <p:spPr>
           <a:xfrm>
-            <a:off x="457200" y="365760"/>
+            <a:off x="457200" y="320040"/>
             <a:ext cx="11274552" cy="640080"/>
           </a:xfrm>
           <a:prstGeom prst="rect">
@@ -9279,7 +9279,7 @@
                 </a:solidFill>
                 <a:latin typeface="Arial"/>
               </a:rPr>
-              <a:t>Vision QC в отлаженных системах: ≥99% при ложных срабатываниях 0,1–2%</a:t>
+              <a:t>Машинное зрение: ≥99% при 0,1–2% ложных срабатываний</a:t>
             </a:r>
           </a:p>
         </p:txBody>
@@ -9292,8 +9292,8 @@
         </p:nvSpPr>
         <p:spPr>
           <a:xfrm>
-            <a:off x="457200" y="1051560"/>
-            <a:ext cx="11274552" cy="365760"/>
+            <a:off x="457200" y="960120"/>
+            <a:ext cx="11274552" cy="502920"/>
           </a:xfrm>
           <a:prstGeom prst="rect">
             <a:avLst/>
@@ -10219,7 +10219,7 @@
                 </a:solidFill>
                 <a:latin typeface="Arial"/>
               </a:rPr>
-              <a:t>Где A0 не применим — границы vision и прогностического обслуживания</a:t>
+              <a:t>Где A0 не применим: границы зрения и прогн. обслуживания</a:t>
             </a:r>
           </a:p>
         </p:txBody>
@@ -10258,7 +10258,7 @@
                 </a:solidFill>
                 <a:latin typeface="Arial"/>
               </a:rPr>
-              <a:t>Жёсткие допуски → метрология + GD&amp;T + SPC · редкие отказы → physics + RCM</a:t>
+              <a:t>Жёсткие допуски → метрология + GD&amp;T + SPC · редкие отказы → физика + RCM</a:t>
             </a:r>
           </a:p>
         </p:txBody>
@@ -19986,7 +19986,7 @@
                 </a:solidFill>
                 <a:latin typeface="Arial"/>
               </a:rPr>
-              <a:t>A3 в 2026: Toyota Digit + BMW Leipzig humanoid — единичные кейсы</a:t>
+              <a:t>A3 в 2026: Toyota Digit + BMW Leipzig — гуманоиды как единичные кейсы</a:t>
             </a:r>
           </a:p>
         </p:txBody>
@@ -28621,7 +28621,7 @@
                 </a:solidFill>
                 <a:latin typeface="Arial"/>
               </a:rPr>
-              <a:t>OPC UA + TSN + ИИ на границе сети inference &lt;10 мс — операционные условия для A2</a:t>
+              <a:t>OPC UA + TSN + ИИ на границе сети, инференс &lt;10 мс — операционные условия для A2</a:t>
             </a:r>
           </a:p>
         </p:txBody>
@@ -29954,7 +29954,7 @@
                 </a:solidFill>
                 <a:latin typeface="Arial"/>
               </a:rPr>
-              <a:t>Три протокола покрывают разные задачи; вместе обеспечивают ИИ на границе сети inference &lt;10 мс</a:t>
+              <a:t>Три протокола покрывают разные задачи; вместе обеспечивают ИИ на границе сети, инференс &lt;10 мс</a:t>
             </a:r>
           </a:p>
         </p:txBody>
@@ -31000,7 +31000,7 @@
                 </a:solidFill>
                 <a:latin typeface="Arial"/>
               </a:rPr>
-              <a:t>Lighthouse Network: 220+ заводов, 90% с AI, +16% EBIT vs peers</a:t>
+              <a:t>Lighthouse Network: 220+ заводов, 90% с AI, +16% EBIT к аналогам</a:t>
             </a:r>
           </a:p>
         </p:txBody>

--- a/library/lectures/lec-12/rendered/lec-12.pptx
+++ b/library/lectures/lec-12/rendered/lec-12.pptx
@@ -1248,7 +1248,7 @@
           <a:p/>
           <a:p>
             <a:r>
-              <a:t>Что мы знаем теперь. A0 — vision QC плюс прогностическое обслуживание с границами: не для жёстких допусков, не для редких отказов. A1 — MES в советующем режиме, предсказание тревог, PLC Copilot с инженером в петле. Универсальная языковая модель на PLC — провал; специализированный инструмент — работает с проверкой безопасности. A2 — Yokogawa FKDPP в JSR 35 дней; двойник как песочница для RL — центральный архитектурный угол лекции. Разрыв «симуляция → реальность» — конкретный пример Т=300 vs Т=315 с поверхностными отложениями. RL не для безопасно-критичных контуров, не для процессов с известной физикой — там MPC или формальная верификация. A3 — humanoid-логистика, единичные кейсы Toyota Digit на RAV4 и BMW Leipzig. Три блокера массового A3.</a:t>
+              <a:t>Что мы знаем теперь. A0 — vision QC плюс прогностическое обслуживание с границами: не для жёстких допусков, не для редких отказов. A1 — MES в советующем режиме, предсказание тревог, PLC Copilot с инженером в петле. Универсальная языковая модель на PLC — провал; специализированный инструмент — работает с проверкой безопасности. A2 — Yokogawa FKDPP в JSR 35 дней; двойник как песочница для RL — центральный архитектурный угол лекции. Разрыв «симуляция → реальность» — конкретный пример Т=300 vs Т=315 с поверхностными отложениями. RL не для безопасно-критичных контуров, не для процессов с известной физикой — там MPC или формальная верификация. A3 — гуманоидная логистика, единичные кейсы Toyota Digit на RAV4 и BMW Leipzig. Три блокера массового A3.</a:t>
             </a:r>
           </a:p>
           <a:p/>
@@ -19889,7 +19889,7 @@
                 </a:solidFill>
                 <a:latin typeface="Arial"/>
               </a:rPr>
-              <a:t>Toyota Digit на RAV4 · BMW Leipzig humanoid · единичные кейсы 2026</a:t>
+              <a:t>Toyota Digit на RAV4 · BMW Leipzig — гуманоиды · единичные кейсы 2026</a:t>
             </a:r>
           </a:p>
           <a:p>
@@ -20088,7 +20088,7 @@
                 </a:solidFill>
                 <a:latin typeface="Arial"/>
               </a:rPr>
-              <a:t>Humanoid-роботы на фабрике · Wikimedia · CC-BY-SA · аналог Agility Digit</a:t>
+              <a:t>Гуманоидные роботы на фабрике · Wikimedia · CC-BY-SA · аналог Agility Digit</a:t>
             </a:r>
           </a:p>
         </p:txBody>
@@ -20297,7 +20297,7 @@
                 </a:solidFill>
                 <a:latin typeface="Arial"/>
               </a:rPr>
-              <a:t>Для критичных по безопасности действий требуется IEC 61508 SIL 2/3 или ATEX Zone 0. RL и humanoid-роботы не сертифицируются.</a:t>
+              <a:t>Для критичных по безопасности действий требуется IEC 61508 SIL 2/3 или ATEX Zone 0. RL и гуманоидные роботы не сертифицируются.</a:t>
             </a:r>
           </a:p>
         </p:txBody>
@@ -20467,7 +20467,7 @@
                 </a:solidFill>
                 <a:latin typeface="Arial"/>
               </a:rPr>
-              <a:t>Humanoid Agility Robotics — несколько сотен тысяч долларов за единицу. Окупается только в нишах с высокой стоимостью труда и предсказуемой задачей.</a:t>
+              <a:t>Гуманоид Agility Robotics — несколько сотен тысяч долларов за единицу. Окупается только в нишах с высокой стоимостью труда и предсказуемой задачей.</a:t>
             </a:r>
           </a:p>
         </p:txBody>
@@ -34983,7 +34983,7 @@
                 </a:solidFill>
                 <a:latin typeface="Arial"/>
               </a:rPr>
-              <a:t>· A3: humanoid-логистика — единично</a:t>
+              <a:t>· A3: гуманоидная логистика — единично</a:t>
             </a:r>
           </a:p>
           <a:p>
@@ -36415,7 +36415,7 @@
                 </a:solidFill>
                 <a:latin typeface="Arial"/>
               </a:rPr>
-              <a:t>Toyota Digit · BMW Leipzig humanoid (единицы)</a:t>
+              <a:t>Toyota Digit · BMW Leipzig — гуманоиды (единицы)</a:t>
             </a:r>
           </a:p>
         </p:txBody>

--- a/library/lectures/lec-12/rendered/lec-12.pptx
+++ b/library/lectures/lec-12/rendered/lec-12.pptx
@@ -932,7 +932,7 @@
           <a:lstStyle/>
           <a:p>
             <a:r>
-              <a:t>Section divider раздела 5: где AI не применим — десять структурных критериев, проработанный пример фарма+FDA, 5 вопросов вендору. Densest failure bucket лекции — 15 минут.</a:t>
+              <a:t>Section divider раздела 5: где AI не применим — десять структурных критериев, проработанный пример фарма+FDA, 5 вопросов вендору. Densest failure bucket лекции.</a:t>
             </a:r>
           </a:p>
         </p:txBody>
@@ -1020,7 +1020,7 @@
           <a:p/>
           <a:p>
             <a:r>
-              <a:t>Разрыв. AI accuracy ±0,5% меньше required tolerance ±0,1%. Это несовместимо. Verdict: AI не подходит для финального release decision.</a:t>
+              <a:t>Разрыв. AI accuracy ±0,5% — в 5 раз шире (хуже) required tolerance ±0,1%. Это несовместимо. Verdict: AI не подходит для финального release decision.</a:t>
             </a:r>
           </a:p>
           <a:p/>
@@ -1494,7 +1494,7 @@
           <a:lstStyle/>
           <a:p>
             <a:r>
-              <a:t>Сегодня мы посвятим 75 минут трём вопросам. Первый — что такое цифровой двойник в 2026 году и почему 75% проектов проваливаются. Второй — на какой ступени автономии (A0, A1, A2 или A3) можно поднять конкретный производственный процесс. Третий — где AI не нужен и какая альтернатива работает лучше.</a:t>
+              <a:t>Сегодня мы разберём три вопроса. Первый — что такое цифровой двойник в 2026 году и почему 75% проектов проваливаются. Второй — на какой ступени автономии (A0, A1, A2 или A3) можно поднять конкретный производственный процесс. Третий — где AI не нужен и какая альтернатива работает лучше.</a:t>
             </a:r>
           </a:p>
           <a:p/>
@@ -1588,7 +1588,7 @@
           <a:p/>
           <a:p>
             <a:r>
-              <a:t>Применимый инструмент для кармана — десять критериев «AI не нужен» из шестого раздела. Запишите их и используйте на первом же совещании с вендором.</a:t>
+              <a:t>Применимый инструмент для кармана — десять критериев «AI не нужен» из пятого раздела. Запишите их и используйте на первом же совещании с вендором.</a:t>
             </a:r>
           </a:p>
         </p:txBody>
@@ -2080,7 +2080,7 @@
           <a:lstStyle/>
           <a:p>
             <a:r>
-              <a:t>Архитектура engineer-in-loop — это пайплайн из пяти стадий, который превращает AI-помощник в безопасный инструмент A1. Стадия первая — AI предлагает рекомендацию: PLC-блок, MES-расписание, изменение параметра. Стадия вторая — инженер ревьюит и корректирует: смотрит на адреса памяти, проверяет логику, исправляет неточности. Стадия третья — симулятор валидирует на twin: прогоняет рекомендацию через симуляцию оборудования, проверяет edge cases, замеряет потенциальные нежелательные эффекты. Стадия четвёртая — safety check: проверка по IEC 61131-3, по тест-кейсам безопасности, по правилам конкретной индустрии. Стадия пятая — deployment, только если все предыдущие стадии прошли успешно.</a:t>
+              <a:t>Архитектура «инженер в петле» (engineer-in-loop) — это пайплайн из пяти стадий, который превращает AI-помощник в безопасный инструмент A1. Стадия первая — AI предлагает рекомендацию: PLC-блок, MES-расписание, изменение параметра. Стадия вторая — инженер ревьюит и корректирует: смотрит на адреса памяти, проверяет логику, исправляет неточности. Стадия третья — симулятор валидирует на twin: прогоняет рекомендацию через симуляцию оборудования, проверяет edge cases, замеряет потенциальные нежелательные эффекты. Стадия четвёртая — safety check: проверка по IEC 61131-3, по тест-кейсам безопасности, по правилам конкретной индустрии. Стадия пятая — deployment, только если все предыдущие стадии прошли успешно.</a:t>
             </a:r>
           </a:p>
           <a:p/>
@@ -3290,7 +3290,7 @@
           <a:p/>
           <a:p>
             <a:r>
-              <a:t>Четвёртая — edge AI engineer. Что делает: деплоит inference на edge-устройства (NVIDIA Jetson, Modicon edge), оптимизирует latency и throughput, разрабатывает fail-safe handover. Ключевые навыки: C++/Rust, embedded Linux, ONNX/TensorRT, real-time scheduling, безопасность сети для КИИ-объектов. Учиться: embedded плюс ML — стык. Сертификации NVIDIA Jetson плюс cybersecurity для КИИ.</a:t>
+              <a:t>Четвёртая — инженер ИИ на границе сети (edge AI engineer). Что делает: разворачивает inference на устройствах вблизи оборудования (NVIDIA Jetson, Modicon edge), оптимизирует latency и throughput, разрабатывает fail-safe handover. Ключевые навыки: C++/Rust, embedded Linux, ONNX/TensorRT, real-time scheduling, безопасность сети для КИИ-объектов. Учиться: embedded плюс ML — стык. Сертификации NVIDIA Jetson плюс cybersecurity для КИИ.</a:t>
             </a:r>
           </a:p>
         </p:txBody>
@@ -23961,7 +23961,7 @@
                 </a:solidFill>
                 <a:latin typeface="Arial"/>
               </a:rPr>
-              <a:t>Точность AI ±0,5% &lt; требуемого допуска ±0,1% — НЕСОВМЕСТИМО</a:t>
+              <a:t>Точность AI ±0,5% — в 5 раз шире (хуже) допуска FDA ±0,1% — НЕСОВМЕСТИМО</a:t>
             </a:r>
           </a:p>
         </p:txBody>
